--- a/docs/part1ca/01_Introduction/CA_Lecture_01.pptx
+++ b/docs/part1ca/01_Introduction/CA_Lecture_01.pptx
@@ -137,7 +137,7 @@
   </p:defaultTextStyle>
   <p:extLst>
     <p:ext uri="{EFAFB233-063F-42B5-8137-9DF3F51BA10A}">
-      <p15:sldGuideLst xmlns="" xmlns:p15="http://schemas.microsoft.com/office/powerpoint/2012/main">
+      <p15:sldGuideLst xmlns:p15="http://schemas.microsoft.com/office/powerpoint/2012/main" xmlns="">
         <p15:guide id="1" orient="horz" pos="2160">
           <p15:clr>
             <a:srgbClr val="A4A3A4"/>
@@ -151,7 +151,7 @@
       </p15:sldGuideLst>
     </p:ext>
     <p:ext uri="{2D200454-40CA-4A62-9FC3-DE9A4176ACB9}">
-      <p15:notesGuideLst xmlns="" xmlns:p15="http://schemas.microsoft.com/office/powerpoint/2012/main">
+      <p15:notesGuideLst xmlns:p15="http://schemas.microsoft.com/office/powerpoint/2012/main" xmlns="">
         <p15:guide id="1" orient="horz" pos="2880">
           <p15:clr>
             <a:srgbClr val="A4A3A4"/>
@@ -259,7 +259,7 @@
             <a:fld id="{D0106195-8D78-4F6F-B8E4-FA67975ACEF5}" type="datetimeFigureOut">
               <a:rPr lang="ru-RU" smtClean="0"/>
               <a:pPr/>
-              <a:t>13.01.2025</a:t>
+              <a:t>12.01.2026</a:t>
             </a:fld>
             <a:endParaRPr lang="ru-RU"/>
           </a:p>
@@ -335,7 +335,7 @@
     </p:spTree>
     <p:extLst>
       <p:ext uri="{BB962C8B-B14F-4D97-AF65-F5344CB8AC3E}">
-        <p14:creationId xmlns="" xmlns:p14="http://schemas.microsoft.com/office/powerpoint/2010/main" val="827279973"/>
+        <p14:creationId xmlns:p14="http://schemas.microsoft.com/office/powerpoint/2010/main" xmlns="" val="827279973"/>
       </p:ext>
     </p:extLst>
   </p:cSld>
@@ -427,7 +427,7 @@
             <a:fld id="{878212F1-C3D9-4F2B-8F42-5E960FE8BE51}" type="datetimeFigureOut">
               <a:rPr lang="ru-RU" smtClean="0"/>
               <a:pPr/>
-              <a:t>13.01.2025</a:t>
+              <a:t>12.01.2026</a:t>
             </a:fld>
             <a:endParaRPr lang="ru-RU"/>
           </a:p>
@@ -596,7 +596,7 @@
     </p:spTree>
     <p:extLst>
       <p:ext uri="{BB962C8B-B14F-4D97-AF65-F5344CB8AC3E}">
-        <p14:creationId xmlns="" xmlns:p14="http://schemas.microsoft.com/office/powerpoint/2010/main" val="3865021395"/>
+        <p14:creationId xmlns:p14="http://schemas.microsoft.com/office/powerpoint/2010/main" xmlns="" val="3865021395"/>
       </p:ext>
     </p:extLst>
   </p:cSld>
@@ -810,7 +810,7 @@
     </p:spTree>
     <p:extLst>
       <p:ext uri="{BB962C8B-B14F-4D97-AF65-F5344CB8AC3E}">
-        <p14:creationId xmlns="" xmlns:p14="http://schemas.microsoft.com/office/powerpoint/2010/main" val="2381791527"/>
+        <p14:creationId xmlns:p14="http://schemas.microsoft.com/office/powerpoint/2010/main" xmlns="" val="2381791527"/>
       </p:ext>
     </p:extLst>
   </p:cSld>
@@ -933,7 +933,7 @@
     </p:spTree>
     <p:extLst>
       <p:ext uri="{BB962C8B-B14F-4D97-AF65-F5344CB8AC3E}">
-        <p14:creationId xmlns="" xmlns:p14="http://schemas.microsoft.com/office/powerpoint/2010/main" val="1915950851"/>
+        <p14:creationId xmlns:p14="http://schemas.microsoft.com/office/powerpoint/2010/main" xmlns="" val="1915950851"/>
       </p:ext>
     </p:extLst>
   </p:cSld>
@@ -1193,7 +1193,7 @@
     </p:spTree>
     <p:extLst>
       <p:ext uri="{BB962C8B-B14F-4D97-AF65-F5344CB8AC3E}">
-        <p14:creationId xmlns="" xmlns:p14="http://schemas.microsoft.com/office/powerpoint/2010/main" val="322455162"/>
+        <p14:creationId xmlns:p14="http://schemas.microsoft.com/office/powerpoint/2010/main" xmlns="" val="322455162"/>
       </p:ext>
     </p:extLst>
   </p:cSld>
@@ -1367,7 +1367,7 @@
     </p:spTree>
     <p:extLst>
       <p:ext uri="{BB962C8B-B14F-4D97-AF65-F5344CB8AC3E}">
-        <p14:creationId xmlns="" xmlns:p14="http://schemas.microsoft.com/office/powerpoint/2010/main" val="971117636"/>
+        <p14:creationId xmlns:p14="http://schemas.microsoft.com/office/powerpoint/2010/main" xmlns="" val="971117636"/>
       </p:ext>
     </p:extLst>
   </p:cSld>
@@ -1544,7 +1544,7 @@
     </p:spTree>
     <p:extLst>
       <p:ext uri="{BB962C8B-B14F-4D97-AF65-F5344CB8AC3E}">
-        <p14:creationId xmlns="" xmlns:p14="http://schemas.microsoft.com/office/powerpoint/2010/main" val="3348877825"/>
+        <p14:creationId xmlns:p14="http://schemas.microsoft.com/office/powerpoint/2010/main" xmlns="" val="3348877825"/>
       </p:ext>
     </p:extLst>
   </p:cSld>
@@ -1869,7 +1869,7 @@
     </p:spTree>
     <p:extLst>
       <p:ext uri="{BB962C8B-B14F-4D97-AF65-F5344CB8AC3E}">
-        <p14:creationId xmlns="" xmlns:p14="http://schemas.microsoft.com/office/powerpoint/2010/main" val="3256953994"/>
+        <p14:creationId xmlns:p14="http://schemas.microsoft.com/office/powerpoint/2010/main" xmlns="" val="3256953994"/>
       </p:ext>
     </p:extLst>
   </p:cSld>
@@ -2119,7 +2119,7 @@
     </p:spTree>
     <p:extLst>
       <p:ext uri="{BB962C8B-B14F-4D97-AF65-F5344CB8AC3E}">
-        <p14:creationId xmlns="" xmlns:p14="http://schemas.microsoft.com/office/powerpoint/2010/main" val="3067076846"/>
+        <p14:creationId xmlns:p14="http://schemas.microsoft.com/office/powerpoint/2010/main" xmlns="" val="3067076846"/>
       </p:ext>
     </p:extLst>
   </p:cSld>
@@ -2355,7 +2355,7 @@
     </p:spTree>
     <p:extLst>
       <p:ext uri="{BB962C8B-B14F-4D97-AF65-F5344CB8AC3E}">
-        <p14:creationId xmlns="" xmlns:p14="http://schemas.microsoft.com/office/powerpoint/2010/main" val="3710015975"/>
+        <p14:creationId xmlns:p14="http://schemas.microsoft.com/office/powerpoint/2010/main" xmlns="" val="3710015975"/>
       </p:ext>
     </p:extLst>
   </p:cSld>
@@ -2726,7 +2726,7 @@
     </p:spTree>
     <p:extLst>
       <p:ext uri="{BB962C8B-B14F-4D97-AF65-F5344CB8AC3E}">
-        <p14:creationId xmlns="" xmlns:p14="http://schemas.microsoft.com/office/powerpoint/2010/main" val="4075590966"/>
+        <p14:creationId xmlns:p14="http://schemas.microsoft.com/office/powerpoint/2010/main" xmlns="" val="4075590966"/>
       </p:ext>
     </p:extLst>
   </p:cSld>
@@ -2848,7 +2848,7 @@
     </p:spTree>
     <p:extLst>
       <p:ext uri="{BB962C8B-B14F-4D97-AF65-F5344CB8AC3E}">
-        <p14:creationId xmlns="" xmlns:p14="http://schemas.microsoft.com/office/powerpoint/2010/main" val="2889604898"/>
+        <p14:creationId xmlns:p14="http://schemas.microsoft.com/office/powerpoint/2010/main" xmlns="" val="2889604898"/>
       </p:ext>
     </p:extLst>
   </p:cSld>
@@ -2947,7 +2947,7 @@
     </p:spTree>
     <p:extLst>
       <p:ext uri="{BB962C8B-B14F-4D97-AF65-F5344CB8AC3E}">
-        <p14:creationId xmlns="" xmlns:p14="http://schemas.microsoft.com/office/powerpoint/2010/main" val="152384765"/>
+        <p14:creationId xmlns:p14="http://schemas.microsoft.com/office/powerpoint/2010/main" xmlns="" val="152384765"/>
       </p:ext>
     </p:extLst>
   </p:cSld>
@@ -3228,7 +3228,7 @@
     </p:spTree>
     <p:extLst>
       <p:ext uri="{BB962C8B-B14F-4D97-AF65-F5344CB8AC3E}">
-        <p14:creationId xmlns="" xmlns:p14="http://schemas.microsoft.com/office/powerpoint/2010/main" val="2127791886"/>
+        <p14:creationId xmlns:p14="http://schemas.microsoft.com/office/powerpoint/2010/main" xmlns="" val="2127791886"/>
       </p:ext>
     </p:extLst>
   </p:cSld>
@@ -3485,7 +3485,7 @@
     </p:spTree>
     <p:extLst>
       <p:ext uri="{BB962C8B-B14F-4D97-AF65-F5344CB8AC3E}">
-        <p14:creationId xmlns="" xmlns:p14="http://schemas.microsoft.com/office/powerpoint/2010/main" val="1752705130"/>
+        <p14:creationId xmlns:p14="http://schemas.microsoft.com/office/powerpoint/2010/main" xmlns="" val="1752705130"/>
       </p:ext>
     </p:extLst>
   </p:cSld>
@@ -3738,7 +3738,7 @@
     </p:spTree>
     <p:extLst>
       <p:ext uri="{BB962C8B-B14F-4D97-AF65-F5344CB8AC3E}">
-        <p14:creationId xmlns="" xmlns:p14="http://schemas.microsoft.com/office/powerpoint/2010/main" val="968833914"/>
+        <p14:creationId xmlns:p14="http://schemas.microsoft.com/office/powerpoint/2010/main" xmlns="" val="968833914"/>
       </p:ext>
     </p:extLst>
   </p:cSld>
@@ -4215,7 +4215,7 @@
     </p:spTree>
     <p:extLst>
       <p:ext uri="{BB962C8B-B14F-4D97-AF65-F5344CB8AC3E}">
-        <p14:creationId xmlns="" xmlns:p14="http://schemas.microsoft.com/office/powerpoint/2010/main" val="2492894732"/>
+        <p14:creationId xmlns:p14="http://schemas.microsoft.com/office/powerpoint/2010/main" xmlns="" val="2492894732"/>
       </p:ext>
     </p:extLst>
   </p:cSld>
@@ -6515,7 +6515,7 @@
     </p:spTree>
     <p:extLst>
       <p:ext uri="{BB962C8B-B14F-4D97-AF65-F5344CB8AC3E}">
-        <p14:creationId xmlns="" xmlns:p14="http://schemas.microsoft.com/office/powerpoint/2010/main" val="2808821390"/>
+        <p14:creationId xmlns:p14="http://schemas.microsoft.com/office/powerpoint/2010/main" xmlns="" val="2808821390"/>
       </p:ext>
     </p:extLst>
   </p:cSld>
@@ -6559,7 +6559,7 @@
             <p:ph idx="1"/>
             <p:extLst>
               <p:ext uri="{D42A27DB-BD31-4B8C-83A1-F6EECF244321}">
-                <p14:modId xmlns="" xmlns:p14="http://schemas.microsoft.com/office/powerpoint/2010/main" val="2853019934"/>
+                <p14:modId xmlns:p14="http://schemas.microsoft.com/office/powerpoint/2010/main" xmlns="" val="2853019934"/>
               </p:ext>
             </p:extLst>
           </p:nvPr>
@@ -6993,7 +6993,7 @@
         </p:txBody>
       </p:sp>
       <mc:AlternateContent xmlns:mc="http://schemas.openxmlformats.org/markup-compatibility/2006">
-        <mc:Choice xmlns="" xmlns:a14="http://schemas.microsoft.com/office/drawing/2010/main" Requires="a14">
+        <mc:Choice xmlns:a14="http://schemas.microsoft.com/office/drawing/2010/main" xmlns="" Requires="a14">
           <p:sp>
             <p:nvSpPr>
               <p:cNvPr id="6" name="Rectangle 5"/>
@@ -7184,7 +7184,7 @@
     </p:spTree>
     <p:extLst>
       <p:ext uri="{BB962C8B-B14F-4D97-AF65-F5344CB8AC3E}">
-        <p14:creationId xmlns="" xmlns:p14="http://schemas.microsoft.com/office/powerpoint/2010/main" val="1319878854"/>
+        <p14:creationId xmlns:p14="http://schemas.microsoft.com/office/powerpoint/2010/main" xmlns="" val="1319878854"/>
       </p:ext>
     </p:extLst>
   </p:cSld>
@@ -7276,7 +7276,7 @@
             <p:ph idx="1"/>
             <p:extLst>
               <p:ext uri="{D42A27DB-BD31-4B8C-83A1-F6EECF244321}">
-                <p14:modId xmlns="" xmlns:p14="http://schemas.microsoft.com/office/powerpoint/2010/main" val="895195415"/>
+                <p14:modId xmlns:p14="http://schemas.microsoft.com/office/powerpoint/2010/main" xmlns="" val="895195415"/>
               </p:ext>
             </p:extLst>
           </p:nvPr>
@@ -7580,7 +7580,7 @@
     </p:spTree>
     <p:extLst>
       <p:ext uri="{BB962C8B-B14F-4D97-AF65-F5344CB8AC3E}">
-        <p14:creationId xmlns="" xmlns:p14="http://schemas.microsoft.com/office/powerpoint/2010/main" val="1991606056"/>
+        <p14:creationId xmlns:p14="http://schemas.microsoft.com/office/powerpoint/2010/main" xmlns="" val="1991606056"/>
       </p:ext>
     </p:extLst>
   </p:cSld>
@@ -7748,7 +7748,7 @@
           <a:blip r:embed="rId2" cstate="print">
             <a:extLst>
               <a:ext uri="{28A0092B-C50C-407E-A947-70E740481C1C}">
-                <a14:useLocalDpi xmlns="" xmlns:a14="http://schemas.microsoft.com/office/drawing/2010/main" val="0"/>
+                <a14:useLocalDpi xmlns:a14="http://schemas.microsoft.com/office/drawing/2010/main" xmlns="" val="0"/>
               </a:ext>
             </a:extLst>
           </a:blip>
@@ -7768,7 +7768,7 @@
           <a:noFill/>
           <a:extLst>
             <a:ext uri="{909E8E84-426E-40DD-AFC4-6F175D3DCCD1}">
-              <a14:hiddenFill xmlns="" xmlns:a14="http://schemas.microsoft.com/office/drawing/2010/main">
+              <a14:hiddenFill xmlns:a14="http://schemas.microsoft.com/office/drawing/2010/main" xmlns="">
                 <a:solidFill>
                   <a:srgbClr val="FFFFFF"/>
                 </a:solidFill>
@@ -7780,7 +7780,7 @@
     </p:spTree>
     <p:extLst>
       <p:ext uri="{BB962C8B-B14F-4D97-AF65-F5344CB8AC3E}">
-        <p14:creationId xmlns="" xmlns:p14="http://schemas.microsoft.com/office/powerpoint/2010/main" val="1147934676"/>
+        <p14:creationId xmlns:p14="http://schemas.microsoft.com/office/powerpoint/2010/main" xmlns="" val="1147934676"/>
       </p:ext>
     </p:extLst>
   </p:cSld>
@@ -8678,7 +8678,7 @@
           <a:blip r:embed="rId2" cstate="print">
             <a:extLst>
               <a:ext uri="{28A0092B-C50C-407E-A947-70E740481C1C}">
-                <a14:useLocalDpi xmlns="" xmlns:a14="http://schemas.microsoft.com/office/drawing/2010/main" val="0"/>
+                <a14:useLocalDpi xmlns:a14="http://schemas.microsoft.com/office/drawing/2010/main" xmlns="" val="0"/>
               </a:ext>
             </a:extLst>
           </a:blip>
@@ -8698,7 +8698,7 @@
           <a:noFill/>
           <a:extLst>
             <a:ext uri="{909E8E84-426E-40DD-AFC4-6F175D3DCCD1}">
-              <a14:hiddenFill xmlns="" xmlns:a14="http://schemas.microsoft.com/office/drawing/2010/main">
+              <a14:hiddenFill xmlns:a14="http://schemas.microsoft.com/office/drawing/2010/main" xmlns="">
                 <a:solidFill>
                   <a:srgbClr val="FFFFFF"/>
                 </a:solidFill>
@@ -8710,7 +8710,7 @@
     </p:spTree>
     <p:extLst>
       <p:ext uri="{BB962C8B-B14F-4D97-AF65-F5344CB8AC3E}">
-        <p14:creationId xmlns="" xmlns:p14="http://schemas.microsoft.com/office/powerpoint/2010/main" val="2950914556"/>
+        <p14:creationId xmlns:p14="http://schemas.microsoft.com/office/powerpoint/2010/main" xmlns="" val="2950914556"/>
       </p:ext>
     </p:extLst>
   </p:cSld>
@@ -8756,7 +8756,7 @@
           <a:blip r:embed="rId2" cstate="print">
             <a:extLst>
               <a:ext uri="{28A0092B-C50C-407E-A947-70E740481C1C}">
-                <a14:useLocalDpi xmlns="" xmlns:a14="http://schemas.microsoft.com/office/drawing/2010/main" val="0"/>
+                <a14:useLocalDpi xmlns:a14="http://schemas.microsoft.com/office/drawing/2010/main" xmlns="" val="0"/>
               </a:ext>
             </a:extLst>
           </a:blip>
@@ -8776,7 +8776,7 @@
           <a:noFill/>
           <a:extLst>
             <a:ext uri="{909E8E84-426E-40DD-AFC4-6F175D3DCCD1}">
-              <a14:hiddenFill xmlns="" xmlns:a14="http://schemas.microsoft.com/office/drawing/2010/main">
+              <a14:hiddenFill xmlns:a14="http://schemas.microsoft.com/office/drawing/2010/main" xmlns="">
                 <a:solidFill>
                   <a:srgbClr val="FFFFFF"/>
                 </a:solidFill>
@@ -9349,7 +9349,7 @@
     </p:spTree>
     <p:extLst>
       <p:ext uri="{BB962C8B-B14F-4D97-AF65-F5344CB8AC3E}">
-        <p14:creationId xmlns="" xmlns:p14="http://schemas.microsoft.com/office/powerpoint/2010/main" val="4087179089"/>
+        <p14:creationId xmlns:p14="http://schemas.microsoft.com/office/powerpoint/2010/main" xmlns="" val="4087179089"/>
       </p:ext>
     </p:extLst>
   </p:cSld>
@@ -9555,7 +9555,7 @@
           <a:blip r:embed="rId2" cstate="print">
             <a:extLst>
               <a:ext uri="{28A0092B-C50C-407E-A947-70E740481C1C}">
-                <a14:useLocalDpi xmlns="" xmlns:a14="http://schemas.microsoft.com/office/drawing/2010/main" val="0"/>
+                <a14:useLocalDpi xmlns:a14="http://schemas.microsoft.com/office/drawing/2010/main" xmlns="" val="0"/>
               </a:ext>
             </a:extLst>
           </a:blip>
@@ -9575,7 +9575,7 @@
           <a:noFill/>
           <a:extLst>
             <a:ext uri="{909E8E84-426E-40DD-AFC4-6F175D3DCCD1}">
-              <a14:hiddenFill xmlns="" xmlns:a14="http://schemas.microsoft.com/office/drawing/2010/main">
+              <a14:hiddenFill xmlns:a14="http://schemas.microsoft.com/office/drawing/2010/main" xmlns="">
                 <a:solidFill>
                   <a:srgbClr val="FFFFFF"/>
                 </a:solidFill>
@@ -9596,7 +9596,7 @@
           <a:blip r:embed="rId3" cstate="print">
             <a:extLst>
               <a:ext uri="{28A0092B-C50C-407E-A947-70E740481C1C}">
-                <a14:useLocalDpi xmlns="" xmlns:a14="http://schemas.microsoft.com/office/drawing/2010/main" val="0"/>
+                <a14:useLocalDpi xmlns:a14="http://schemas.microsoft.com/office/drawing/2010/main" xmlns="" val="0"/>
               </a:ext>
             </a:extLst>
           </a:blip>
@@ -9616,7 +9616,7 @@
           <a:noFill/>
           <a:extLst>
             <a:ext uri="{909E8E84-426E-40DD-AFC4-6F175D3DCCD1}">
-              <a14:hiddenFill xmlns="" xmlns:a14="http://schemas.microsoft.com/office/drawing/2010/main">
+              <a14:hiddenFill xmlns:a14="http://schemas.microsoft.com/office/drawing/2010/main" xmlns="">
                 <a:solidFill>
                   <a:srgbClr val="FFFFFF"/>
                 </a:solidFill>
@@ -9628,7 +9628,7 @@
     </p:spTree>
     <p:extLst>
       <p:ext uri="{BB962C8B-B14F-4D97-AF65-F5344CB8AC3E}">
-        <p14:creationId xmlns="" xmlns:p14="http://schemas.microsoft.com/office/powerpoint/2010/main" val="4020093932"/>
+        <p14:creationId xmlns:p14="http://schemas.microsoft.com/office/powerpoint/2010/main" xmlns="" val="4020093932"/>
       </p:ext>
     </p:extLst>
   </p:cSld>
@@ -9841,7 +9841,7 @@
           <a:blip r:embed="rId2" cstate="print">
             <a:extLst>
               <a:ext uri="{28A0092B-C50C-407E-A947-70E740481C1C}">
-                <a14:useLocalDpi xmlns="" xmlns:a14="http://schemas.microsoft.com/office/drawing/2010/main" val="0"/>
+                <a14:useLocalDpi xmlns:a14="http://schemas.microsoft.com/office/drawing/2010/main" xmlns="" val="0"/>
               </a:ext>
             </a:extLst>
           </a:blip>
@@ -9864,14 +9864,14 @@
           </a:ln>
           <a:extLst>
             <a:ext uri="{909E8E84-426E-40DD-AFC4-6F175D3DCCD1}">
-              <a14:hiddenFill xmlns="" xmlns:a14="http://schemas.microsoft.com/office/drawing/2010/main">
+              <a14:hiddenFill xmlns:a14="http://schemas.microsoft.com/office/drawing/2010/main" xmlns="">
                 <a:solidFill>
                   <a:srgbClr val="FFFFFF"/>
                 </a:solidFill>
               </a14:hiddenFill>
             </a:ext>
             <a:ext uri="{91240B29-F687-4F45-9708-019B960494DF}">
-              <a14:hiddenLine xmlns="" xmlns:a14="http://schemas.microsoft.com/office/drawing/2010/main" w="9525">
+              <a14:hiddenLine xmlns:a14="http://schemas.microsoft.com/office/drawing/2010/main" xmlns="" w="9525">
                 <a:solidFill>
                   <a:srgbClr val="000000"/>
                 </a:solidFill>
@@ -9886,7 +9886,7 @@
     </p:spTree>
     <p:extLst>
       <p:ext uri="{BB962C8B-B14F-4D97-AF65-F5344CB8AC3E}">
-        <p14:creationId xmlns="" xmlns:p14="http://schemas.microsoft.com/office/powerpoint/2010/main" val="3856844071"/>
+        <p14:creationId xmlns:p14="http://schemas.microsoft.com/office/powerpoint/2010/main" xmlns="" val="3856844071"/>
       </p:ext>
     </p:extLst>
   </p:cSld>
@@ -9932,7 +9932,7 @@
           <a:blip r:embed="rId2" cstate="print">
             <a:extLst>
               <a:ext uri="{28A0092B-C50C-407E-A947-70E740481C1C}">
-                <a14:useLocalDpi xmlns="" xmlns:a14="http://schemas.microsoft.com/office/drawing/2010/main" val="0"/>
+                <a14:useLocalDpi xmlns:a14="http://schemas.microsoft.com/office/drawing/2010/main" xmlns="" val="0"/>
               </a:ext>
             </a:extLst>
           </a:blip>
@@ -9955,14 +9955,14 @@
           </a:ln>
           <a:extLst>
             <a:ext uri="{909E8E84-426E-40DD-AFC4-6F175D3DCCD1}">
-              <a14:hiddenFill xmlns="" xmlns:a14="http://schemas.microsoft.com/office/drawing/2010/main">
+              <a14:hiddenFill xmlns:a14="http://schemas.microsoft.com/office/drawing/2010/main" xmlns="">
                 <a:solidFill>
                   <a:srgbClr val="FFFFFF"/>
                 </a:solidFill>
               </a14:hiddenFill>
             </a:ext>
             <a:ext uri="{91240B29-F687-4F45-9708-019B960494DF}">
-              <a14:hiddenLine xmlns="" xmlns:a14="http://schemas.microsoft.com/office/drawing/2010/main" w="9525">
+              <a14:hiddenLine xmlns:a14="http://schemas.microsoft.com/office/drawing/2010/main" xmlns="" w="9525">
                 <a:solidFill>
                   <a:srgbClr val="000000"/>
                 </a:solidFill>
@@ -10468,7 +10468,7 @@
           <p:nvPr>
             <p:extLst>
               <p:ext uri="{D42A27DB-BD31-4B8C-83A1-F6EECF244321}">
-                <p14:modId xmlns="" xmlns:p14="http://schemas.microsoft.com/office/powerpoint/2010/main" val="1213753623"/>
+                <p14:modId xmlns:p14="http://schemas.microsoft.com/office/powerpoint/2010/main" xmlns="" val="1213753623"/>
               </p:ext>
             </p:extLst>
           </p:nvPr>
@@ -12181,7 +12181,7 @@
     </p:spTree>
     <p:extLst>
       <p:ext uri="{BB962C8B-B14F-4D97-AF65-F5344CB8AC3E}">
-        <p14:creationId xmlns="" xmlns:p14="http://schemas.microsoft.com/office/powerpoint/2010/main" val="1153504515"/>
+        <p14:creationId xmlns:p14="http://schemas.microsoft.com/office/powerpoint/2010/main" xmlns="" val="1153504515"/>
       </p:ext>
     </p:extLst>
   </p:cSld>
@@ -12631,7 +12631,7 @@
     </p:spTree>
     <p:extLst>
       <p:ext uri="{BB962C8B-B14F-4D97-AF65-F5344CB8AC3E}">
-        <p14:creationId xmlns="" xmlns:p14="http://schemas.microsoft.com/office/powerpoint/2010/main" val="664014649"/>
+        <p14:creationId xmlns:p14="http://schemas.microsoft.com/office/powerpoint/2010/main" xmlns="" val="664014649"/>
       </p:ext>
     </p:extLst>
   </p:cSld>
@@ -13036,7 +13036,7 @@
     </p:spTree>
     <p:extLst>
       <p:ext uri="{BB962C8B-B14F-4D97-AF65-F5344CB8AC3E}">
-        <p14:creationId xmlns="" xmlns:p14="http://schemas.microsoft.com/office/powerpoint/2010/main" val="1974197127"/>
+        <p14:creationId xmlns:p14="http://schemas.microsoft.com/office/powerpoint/2010/main" xmlns="" val="1974197127"/>
       </p:ext>
     </p:extLst>
   </p:cSld>
@@ -13130,7 +13130,7 @@
           <a:blip r:embed="rId2" cstate="print">
             <a:extLst>
               <a:ext uri="{28A0092B-C50C-407E-A947-70E740481C1C}">
-                <a14:useLocalDpi xmlns="" xmlns:a14="http://schemas.microsoft.com/office/drawing/2010/main" val="0"/>
+                <a14:useLocalDpi xmlns:a14="http://schemas.microsoft.com/office/drawing/2010/main" xmlns="" val="0"/>
               </a:ext>
             </a:extLst>
           </a:blip>
@@ -13153,14 +13153,14 @@
           </a:ln>
           <a:extLst>
             <a:ext uri="{909E8E84-426E-40DD-AFC4-6F175D3DCCD1}">
-              <a14:hiddenFill xmlns="" xmlns:a14="http://schemas.microsoft.com/office/drawing/2010/main">
+              <a14:hiddenFill xmlns:a14="http://schemas.microsoft.com/office/drawing/2010/main" xmlns="">
                 <a:solidFill>
                   <a:srgbClr val="FFFFFF"/>
                 </a:solidFill>
               </a14:hiddenFill>
             </a:ext>
             <a:ext uri="{91240B29-F687-4F45-9708-019B960494DF}">
-              <a14:hiddenLine xmlns="" xmlns:a14="http://schemas.microsoft.com/office/drawing/2010/main" w="9525">
+              <a14:hiddenLine xmlns:a14="http://schemas.microsoft.com/office/drawing/2010/main" xmlns="" w="9525">
                 <a:solidFill>
                   <a:srgbClr val="000000"/>
                 </a:solidFill>
@@ -13175,7 +13175,7 @@
     </p:spTree>
     <p:extLst>
       <p:ext uri="{BB962C8B-B14F-4D97-AF65-F5344CB8AC3E}">
-        <p14:creationId xmlns="" xmlns:p14="http://schemas.microsoft.com/office/powerpoint/2010/main" val="2270459329"/>
+        <p14:creationId xmlns:p14="http://schemas.microsoft.com/office/powerpoint/2010/main" xmlns="" val="2270459329"/>
       </p:ext>
     </p:extLst>
   </p:cSld>
@@ -13284,7 +13284,7 @@
     </p:spTree>
     <p:extLst>
       <p:ext uri="{BB962C8B-B14F-4D97-AF65-F5344CB8AC3E}">
-        <p14:creationId xmlns="" xmlns:p14="http://schemas.microsoft.com/office/powerpoint/2010/main" val="4095291685"/>
+        <p14:creationId xmlns:p14="http://schemas.microsoft.com/office/powerpoint/2010/main" xmlns="" val="4095291685"/>
       </p:ext>
     </p:extLst>
   </p:cSld>
@@ -13547,7 +13547,7 @@
     </p:spTree>
     <p:extLst>
       <p:ext uri="{BB962C8B-B14F-4D97-AF65-F5344CB8AC3E}">
-        <p14:creationId xmlns="" xmlns:p14="http://schemas.microsoft.com/office/powerpoint/2010/main" val="1324819286"/>
+        <p14:creationId xmlns:p14="http://schemas.microsoft.com/office/powerpoint/2010/main" xmlns="" val="1324819286"/>
       </p:ext>
     </p:extLst>
   </p:cSld>
@@ -13740,14 +13740,14 @@
           <a:effectLst/>
           <a:extLst>
             <a:ext uri="{909E8E84-426E-40DD-AFC4-6F175D3DCCD1}">
-              <a14:hiddenFill xmlns="" xmlns:a14="http://schemas.microsoft.com/office/drawing/2010/main">
+              <a14:hiddenFill xmlns:a14="http://schemas.microsoft.com/office/drawing/2010/main" xmlns="">
                 <a:solidFill>
                   <a:schemeClr val="accent1"/>
                 </a:solidFill>
               </a14:hiddenFill>
             </a:ext>
             <a:ext uri="{91240B29-F687-4F45-9708-019B960494DF}">
-              <a14:hiddenLine xmlns="" xmlns:a14="http://schemas.microsoft.com/office/drawing/2010/main" w="9525">
+              <a14:hiddenLine xmlns:a14="http://schemas.microsoft.com/office/drawing/2010/main" xmlns="" w="9525">
                 <a:solidFill>
                   <a:schemeClr val="tx1"/>
                 </a:solidFill>
@@ -13757,7 +13757,7 @@
               </a14:hiddenLine>
             </a:ext>
             <a:ext uri="{AF507438-7753-43E0-B8FC-AC1667EBCBE1}">
-              <a14:hiddenEffects xmlns="" xmlns:a14="http://schemas.microsoft.com/office/drawing/2010/main">
+              <a14:hiddenEffects xmlns:a14="http://schemas.microsoft.com/office/drawing/2010/main" xmlns="">
                 <a:effectLst>
                   <a:outerShdw dist="35921" dir="2700000" algn="ctr" rotWithShape="0">
                     <a:schemeClr val="bg2"/>
@@ -13865,7 +13865,7 @@
     </p:spTree>
     <p:extLst>
       <p:ext uri="{BB962C8B-B14F-4D97-AF65-F5344CB8AC3E}">
-        <p14:creationId xmlns="" xmlns:p14="http://schemas.microsoft.com/office/powerpoint/2010/main" val="3293126798"/>
+        <p14:creationId xmlns:p14="http://schemas.microsoft.com/office/powerpoint/2010/main" xmlns="" val="3293126798"/>
       </p:ext>
     </p:extLst>
   </p:cSld>
@@ -14446,7 +14446,7 @@
     </p:spTree>
     <p:extLst>
       <p:ext uri="{BB962C8B-B14F-4D97-AF65-F5344CB8AC3E}">
-        <p14:creationId xmlns="" xmlns:p14="http://schemas.microsoft.com/office/powerpoint/2010/main" val="4217875043"/>
+        <p14:creationId xmlns:p14="http://schemas.microsoft.com/office/powerpoint/2010/main" xmlns="" val="4217875043"/>
       </p:ext>
     </p:extLst>
   </p:cSld>
@@ -14488,7 +14488,7 @@
         </p:nvSpPr>
         <p:spPr>
           <a:xfrm>
-            <a:off x="1783860" y="3279410"/>
+            <a:off x="450360" y="3279410"/>
             <a:ext cx="2422568" cy="629392"/>
           </a:xfrm>
           <a:prstGeom prst="rect">
@@ -14624,7 +14624,7 @@
         </p:blipFill>
         <p:spPr>
           <a:xfrm>
-            <a:off x="2097992" y="1428488"/>
+            <a:off x="774017" y="1438013"/>
             <a:ext cx="1938748" cy="1974742"/>
           </a:xfrm>
           <a:prstGeom prst="rect">
@@ -14694,60 +14694,13 @@
       </p:sp>
       <p:sp>
         <p:nvSpPr>
-          <p:cNvPr id="10" name="TextBox 9"/>
-          <p:cNvSpPr txBox="1"/>
-          <p:nvPr/>
-        </p:nvSpPr>
-        <p:spPr>
-          <a:xfrm>
-            <a:off x="3968035" y="3272640"/>
-            <a:ext cx="2422568" cy="629392"/>
-          </a:xfrm>
-          <a:prstGeom prst="rect">
-            <a:avLst/>
-          </a:prstGeom>
-          <a:noFill/>
-        </p:spPr>
-        <p:txBody>
-          <a:bodyPr wrap="square" lIns="72000" tIns="25200" rIns="0" bIns="25200" rtlCol="0" anchor="ctr" anchorCtr="0">
-            <a:noAutofit/>
-          </a:bodyPr>
-          <a:lstStyle/>
-          <a:p>
-            <a:pPr algn="ctr"/>
-            <a:r>
-              <a:rPr lang="en-US" sz="2300" b="1" dirty="0" smtClean="0">
-                <a:solidFill>
-                  <a:srgbClr val="1E3272"/>
-                </a:solidFill>
-              </a:rPr>
-              <a:t>Sergey </a:t>
-            </a:r>
-            <a:r>
-              <a:rPr lang="en-US" sz="2300" b="1" dirty="0" err="1" smtClean="0">
-                <a:solidFill>
-                  <a:srgbClr val="1E3272"/>
-                </a:solidFill>
-              </a:rPr>
-              <a:t>Khil</a:t>
-            </a:r>
-            <a:endParaRPr lang="ru-RU" sz="2300" b="1" dirty="0" smtClean="0">
-              <a:solidFill>
-                <a:srgbClr val="1E3272"/>
-              </a:solidFill>
-            </a:endParaRPr>
-          </a:p>
-        </p:txBody>
-      </p:sp>
-      <p:sp>
-        <p:nvSpPr>
           <p:cNvPr id="21" name="TextBox 20"/>
           <p:cNvSpPr txBox="1"/>
           <p:nvPr/>
         </p:nvSpPr>
         <p:spPr>
           <a:xfrm>
-            <a:off x="6012595" y="3262859"/>
+            <a:off x="4679095" y="3262859"/>
             <a:ext cx="2600797" cy="629392"/>
           </a:xfrm>
           <a:prstGeom prst="rect">
@@ -14794,7 +14747,7 @@
         </p:nvSpPr>
         <p:spPr>
           <a:xfrm>
-            <a:off x="5042149" y="5995706"/>
+            <a:off x="1936999" y="5967131"/>
             <a:ext cx="2257640" cy="408521"/>
           </a:xfrm>
           <a:prstGeom prst="rect">
@@ -14815,62 +14768,15 @@
                   <a:srgbClr val="1E3272"/>
                 </a:solidFill>
               </a:rPr>
-              <a:t>Nikita Kalinin</a:t>
-            </a:r>
-            <a:endParaRPr lang="ru-RU" sz="2000" b="1" dirty="0" smtClean="0">
-              <a:solidFill>
-                <a:srgbClr val="1E3272"/>
-              </a:solidFill>
-            </a:endParaRPr>
-          </a:p>
-        </p:txBody>
-      </p:sp>
-      <p:sp>
-        <p:nvSpPr>
-          <p:cNvPr id="29" name="TextBox 28"/>
-          <p:cNvSpPr txBox="1"/>
-          <p:nvPr/>
-        </p:nvSpPr>
-        <p:spPr>
-          <a:xfrm>
-            <a:off x="7180733" y="5998491"/>
-            <a:ext cx="1984191" cy="408521"/>
-          </a:xfrm>
-          <a:prstGeom prst="rect">
-            <a:avLst/>
-          </a:prstGeom>
-          <a:noFill/>
-        </p:spPr>
-        <p:txBody>
-          <a:bodyPr wrap="square" lIns="72000" tIns="25200" rIns="0" bIns="25200" rtlCol="0" anchor="ctr" anchorCtr="0">
-            <a:noAutofit/>
-          </a:bodyPr>
-          <a:lstStyle/>
-          <a:p>
-            <a:pPr algn="ctr"/>
+              <a:t>Michael </a:t>
+            </a:r>
             <a:r>
               <a:rPr lang="en-US" sz="2000" b="1" dirty="0" err="1" smtClean="0">
                 <a:solidFill>
                   <a:srgbClr val="1E3272"/>
                 </a:solidFill>
               </a:rPr>
-              <a:t>Adamey</a:t>
-            </a:r>
-            <a:r>
-              <a:rPr lang="en-US" sz="2000" b="1" dirty="0" smtClean="0">
-                <a:solidFill>
-                  <a:srgbClr val="1E3272"/>
-                </a:solidFill>
-              </a:rPr>
-              <a:t> </a:t>
-            </a:r>
-            <a:r>
-              <a:rPr lang="en-US" sz="2000" b="1" dirty="0" err="1" smtClean="0">
-                <a:solidFill>
-                  <a:srgbClr val="1E3272"/>
-                </a:solidFill>
-              </a:rPr>
-              <a:t>Laipanov</a:t>
+              <a:t>Logvinchuk</a:t>
             </a:r>
             <a:endParaRPr lang="ru-RU" sz="2000" b="1" dirty="0" smtClean="0">
               <a:solidFill>
@@ -14888,7 +14794,7 @@
         </p:nvSpPr>
         <p:spPr>
           <a:xfrm>
-            <a:off x="3288503" y="5970045"/>
+            <a:off x="173828" y="5970045"/>
             <a:ext cx="1928227" cy="408521"/>
           </a:xfrm>
           <a:prstGeom prst="rect">
@@ -14904,28 +14810,20 @@
           <a:p>
             <a:pPr algn="ctr"/>
             <a:r>
+              <a:rPr lang="en-US" sz="2000" b="1" dirty="0" smtClean="0">
+                <a:solidFill>
+                  <a:srgbClr val="1E3272"/>
+                </a:solidFill>
+              </a:rPr>
+              <a:t>Ivan </a:t>
+            </a:r>
+            <a:r>
               <a:rPr lang="en-US" sz="2000" b="1" dirty="0" err="1" smtClean="0">
                 <a:solidFill>
                   <a:srgbClr val="1E3272"/>
                 </a:solidFill>
               </a:rPr>
-              <a:t>Pavel</a:t>
-            </a:r>
-            <a:r>
-              <a:rPr lang="en-US" sz="2000" b="1" dirty="0" smtClean="0">
-                <a:solidFill>
-                  <a:srgbClr val="1E3272"/>
-                </a:solidFill>
-              </a:rPr>
-              <a:t> </a:t>
-            </a:r>
-            <a:r>
-              <a:rPr lang="en-US" sz="2000" b="1" dirty="0" err="1" smtClean="0">
-                <a:solidFill>
-                  <a:srgbClr val="1E3272"/>
-                </a:solidFill>
-              </a:rPr>
-              <a:t>Nedbay</a:t>
+              <a:t>Mashkarin</a:t>
             </a:r>
             <a:endParaRPr lang="ru-RU" sz="2000" b="1" dirty="0" smtClean="0">
               <a:solidFill>
@@ -14943,7 +14841,7 @@
         </p:nvSpPr>
         <p:spPr>
           <a:xfrm>
-            <a:off x="8113023" y="3251278"/>
+            <a:off x="6779523" y="3251278"/>
             <a:ext cx="2600797" cy="629392"/>
           </a:xfrm>
           <a:prstGeom prst="rect">
@@ -14999,58 +14897,8 @@
         </p:blipFill>
         <p:spPr>
           <a:xfrm>
-            <a:off x="6314727" y="1407999"/>
+            <a:off x="4933602" y="1436574"/>
             <a:ext cx="2108138" cy="1951227"/>
-          </a:xfrm>
-          <a:prstGeom prst="rect">
-            <a:avLst/>
-          </a:prstGeom>
-        </p:spPr>
-      </p:pic>
-      <p:pic>
-        <p:nvPicPr>
-          <p:cNvPr id="25" name="Рисунок 24" descr="photo_2024-01-07_13-30-36.jpg"/>
-          <p:cNvPicPr>
-            <a:picLocks noChangeAspect="1"/>
-          </p:cNvPicPr>
-          <p:nvPr/>
-        </p:nvPicPr>
-        <p:blipFill>
-          <a:blip r:embed="rId4" cstate="print"/>
-          <a:srcRect r="32480"/>
-          <a:stretch>
-            <a:fillRect/>
-          </a:stretch>
-        </p:blipFill>
-        <p:spPr>
-          <a:xfrm>
-            <a:off x="3388978" y="4310750"/>
-            <a:ext cx="1728728" cy="1706213"/>
-          </a:xfrm>
-          <a:prstGeom prst="rect">
-            <a:avLst/>
-          </a:prstGeom>
-        </p:spPr>
-      </p:pic>
-      <p:pic>
-        <p:nvPicPr>
-          <p:cNvPr id="26" name="Рисунок 25" descr="20240405_110911.jpg"/>
-          <p:cNvPicPr>
-            <a:picLocks noChangeAspect="1"/>
-          </p:cNvPicPr>
-          <p:nvPr/>
-        </p:nvPicPr>
-        <p:blipFill>
-          <a:blip r:embed="rId5" cstate="print"/>
-          <a:srcRect l="10195"/>
-          <a:stretch>
-            <a:fillRect/>
-          </a:stretch>
-        </p:blipFill>
-        <p:spPr>
-          <a:xfrm rot="5400000">
-            <a:off x="4252090" y="1588744"/>
-            <a:ext cx="1934328" cy="1615440"/>
           </a:xfrm>
           <a:prstGeom prst="rect">
             <a:avLst/>
@@ -15066,7 +14914,7 @@
           <p:nvPr/>
         </p:nvPicPr>
         <p:blipFill>
-          <a:blip r:embed="rId6" cstate="print"/>
+          <a:blip r:embed="rId4" cstate="print"/>
           <a:srcRect l="4477" t="22441" r="12151" b="37795"/>
           <a:stretch>
             <a:fillRect/>
@@ -15074,8 +14922,176 @@
         </p:blipFill>
         <p:spPr>
           <a:xfrm>
-            <a:off x="8533850" y="1418221"/>
+            <a:off x="7200350" y="1418221"/>
             <a:ext cx="1877296" cy="1939211"/>
+          </a:xfrm>
+          <a:prstGeom prst="rect">
+            <a:avLst/>
+          </a:prstGeom>
+        </p:spPr>
+      </p:pic>
+      <p:sp>
+        <p:nvSpPr>
+          <p:cNvPr id="20" name="TextBox 19"/>
+          <p:cNvSpPr txBox="1"/>
+          <p:nvPr/>
+        </p:nvSpPr>
+        <p:spPr>
+          <a:xfrm>
+            <a:off x="2657025" y="3343586"/>
+            <a:ext cx="2380341" cy="490922"/>
+          </a:xfrm>
+          <a:prstGeom prst="rect">
+            <a:avLst/>
+          </a:prstGeom>
+          <a:noFill/>
+        </p:spPr>
+        <p:txBody>
+          <a:bodyPr wrap="square" lIns="72000" tIns="25200" rIns="0" bIns="25200" rtlCol="0" anchor="ctr" anchorCtr="0">
+            <a:noAutofit/>
+          </a:bodyPr>
+          <a:lstStyle/>
+          <a:p>
+            <a:pPr algn="ctr"/>
+            <a:r>
+              <a:rPr lang="en-US" sz="2300" b="1" dirty="0" err="1" smtClean="0">
+                <a:solidFill>
+                  <a:srgbClr val="1E3272"/>
+                </a:solidFill>
+              </a:rPr>
+              <a:t>Fedor</a:t>
+            </a:r>
+            <a:r>
+              <a:rPr lang="en-US" sz="2300" b="1" dirty="0" smtClean="0">
+                <a:solidFill>
+                  <a:srgbClr val="1E3272"/>
+                </a:solidFill>
+              </a:rPr>
+              <a:t> </a:t>
+            </a:r>
+            <a:r>
+              <a:rPr lang="en-US" sz="2300" b="1" dirty="0" err="1" smtClean="0">
+                <a:solidFill>
+                  <a:srgbClr val="1E3272"/>
+                </a:solidFill>
+              </a:rPr>
+              <a:t>Pakhurov</a:t>
+            </a:r>
+            <a:endParaRPr lang="ru-RU" sz="2300" b="1" dirty="0" smtClean="0">
+              <a:solidFill>
+                <a:srgbClr val="1E3272"/>
+              </a:solidFill>
+            </a:endParaRPr>
+          </a:p>
+        </p:txBody>
+      </p:sp>
+      <p:pic>
+        <p:nvPicPr>
+          <p:cNvPr id="22" name="Рисунок 21" descr="IMG_6901.jpg"/>
+          <p:cNvPicPr>
+            <a:picLocks noChangeAspect="1"/>
+          </p:cNvPicPr>
+          <p:nvPr/>
+        </p:nvPicPr>
+        <p:blipFill>
+          <a:blip r:embed="rId5" cstate="print"/>
+          <a:srcRect l="4076" t="15303" r="4076" b="6121"/>
+          <a:stretch>
+            <a:fillRect/>
+          </a:stretch>
+        </p:blipFill>
+        <p:spPr>
+          <a:xfrm>
+            <a:off x="2969697" y="1434675"/>
+            <a:ext cx="1719801" cy="1959411"/>
+          </a:xfrm>
+          <a:prstGeom prst="rect">
+            <a:avLst/>
+          </a:prstGeom>
+        </p:spPr>
+      </p:pic>
+      <p:sp>
+        <p:nvSpPr>
+          <p:cNvPr id="23" name="TextBox 22"/>
+          <p:cNvSpPr txBox="1"/>
+          <p:nvPr/>
+        </p:nvSpPr>
+        <p:spPr>
+          <a:xfrm>
+            <a:off x="8884548" y="3260803"/>
+            <a:ext cx="2600797" cy="629392"/>
+          </a:xfrm>
+          <a:prstGeom prst="rect">
+            <a:avLst/>
+          </a:prstGeom>
+          <a:noFill/>
+        </p:spPr>
+        <p:txBody>
+          <a:bodyPr wrap="square" lIns="72000" tIns="25200" rIns="0" bIns="25200" rtlCol="0" anchor="ctr" anchorCtr="0">
+            <a:noAutofit/>
+          </a:bodyPr>
+          <a:lstStyle/>
+          <a:p>
+            <a:pPr algn="ctr"/>
+            <a:r>
+              <a:rPr lang="en-US" sz="2300" b="1" dirty="0" smtClean="0">
+                <a:solidFill>
+                  <a:srgbClr val="1E3272"/>
+                </a:solidFill>
+              </a:rPr>
+              <a:t> </a:t>
+            </a:r>
+            <a:r>
+              <a:rPr lang="en-US" sz="2300" b="1" dirty="0" err="1" smtClean="0">
+                <a:solidFill>
+                  <a:srgbClr val="1E3272"/>
+                </a:solidFill>
+              </a:rPr>
+              <a:t>Gleb</a:t>
+            </a:r>
+            <a:r>
+              <a:rPr lang="en-US" sz="2300" b="1" dirty="0" smtClean="0">
+                <a:solidFill>
+                  <a:srgbClr val="1E3272"/>
+                </a:solidFill>
+              </a:rPr>
+              <a:t> </a:t>
+            </a:r>
+            <a:r>
+              <a:rPr lang="en-US" sz="2300" b="1" dirty="0" err="1" smtClean="0">
+                <a:solidFill>
+                  <a:srgbClr val="1E3272"/>
+                </a:solidFill>
+              </a:rPr>
+              <a:t>Stepanov</a:t>
+            </a:r>
+            <a:endParaRPr lang="ru-RU" sz="2300" b="1" dirty="0" smtClean="0">
+              <a:solidFill>
+                <a:srgbClr val="1E3272"/>
+              </a:solidFill>
+            </a:endParaRPr>
+          </a:p>
+        </p:txBody>
+      </p:sp>
+      <p:pic>
+        <p:nvPicPr>
+          <p:cNvPr id="24" name="Рисунок 23" descr="DSC03396~2.jpg"/>
+          <p:cNvPicPr>
+            <a:picLocks noChangeAspect="1"/>
+          </p:cNvPicPr>
+          <p:nvPr/>
+        </p:nvPicPr>
+        <p:blipFill>
+          <a:blip r:embed="rId6" cstate="print"/>
+          <a:srcRect l="13522" r="11873" b="47955"/>
+          <a:stretch>
+            <a:fillRect/>
+          </a:stretch>
+        </p:blipFill>
+        <p:spPr>
+          <a:xfrm>
+            <a:off x="9281736" y="1428759"/>
+            <a:ext cx="2035849" cy="1894923"/>
           </a:xfrm>
           <a:prstGeom prst="rect">
             <a:avLst/>
@@ -15084,7 +15100,7 @@
       </p:pic>
       <p:pic>
         <p:nvPicPr>
-          <p:cNvPr id="41" name="Рисунок 40" descr="2025-01-12 15.46.50.jpg"/>
+          <p:cNvPr id="27" name="Рисунок 26" descr="photo_2026-01-12_19-51-29.jpg"/>
           <p:cNvPicPr>
             <a:picLocks noChangeAspect="1"/>
           </p:cNvPicPr>
@@ -15092,15 +15108,15 @@
         </p:nvPicPr>
         <p:blipFill>
           <a:blip r:embed="rId7" cstate="print"/>
-          <a:srcRect l="27891" t="31496" r="22768" b="27997"/>
+          <a:srcRect b="8858"/>
           <a:stretch>
             <a:fillRect/>
           </a:stretch>
         </p:blipFill>
         <p:spPr>
           <a:xfrm>
-            <a:off x="7248946" y="4308133"/>
-            <a:ext cx="1841168" cy="1720993"/>
+            <a:off x="457200" y="4238632"/>
+            <a:ext cx="1463040" cy="1777925"/>
           </a:xfrm>
           <a:prstGeom prst="rect">
             <a:avLst/>
@@ -15109,7 +15125,7 @@
       </p:pic>
       <p:pic>
         <p:nvPicPr>
-          <p:cNvPr id="43" name="Рисунок 42" descr="photo_2025-01-12_22-53-57.jpg"/>
+          <p:cNvPr id="35" name="Рисунок 34" descr="photo_2026-01-12_19-59-15.jpg"/>
           <p:cNvPicPr>
             <a:picLocks noChangeAspect="1"/>
           </p:cNvPicPr>
@@ -15117,15 +15133,115 @@
         </p:nvPicPr>
         <p:blipFill>
           <a:blip r:embed="rId8" cstate="print"/>
-          <a:srcRect l="3547" t="13583" r="7488" b="22441"/>
+          <a:srcRect l="4864" t="16609" r="15036" b="38533"/>
           <a:stretch>
             <a:fillRect/>
           </a:stretch>
         </p:blipFill>
         <p:spPr>
           <a:xfrm>
-            <a:off x="5287479" y="4304683"/>
-            <a:ext cx="1787829" cy="1715993"/>
+            <a:off x="2258120" y="4253761"/>
+            <a:ext cx="1564951" cy="1750108"/>
+          </a:xfrm>
+          <a:prstGeom prst="rect">
+            <a:avLst/>
+          </a:prstGeom>
+        </p:spPr>
+      </p:pic>
+      <p:pic>
+        <p:nvPicPr>
+          <p:cNvPr id="37" name="Рисунок 36" descr="photo_2026-01-12_20-04-05.jpg"/>
+          <p:cNvPicPr>
+            <a:picLocks noChangeAspect="1"/>
+          </p:cNvPicPr>
+          <p:nvPr/>
+        </p:nvPicPr>
+        <p:blipFill>
+          <a:blip r:embed="rId9" cstate="print"/>
+          <a:srcRect t="23031" r="18917" b="2657"/>
+          <a:stretch>
+            <a:fillRect/>
+          </a:stretch>
+        </p:blipFill>
+        <p:spPr>
+          <a:xfrm>
+            <a:off x="4203218" y="4237001"/>
+            <a:ext cx="1407236" cy="1721405"/>
+          </a:xfrm>
+          <a:prstGeom prst="rect">
+            <a:avLst/>
+          </a:prstGeom>
+        </p:spPr>
+      </p:pic>
+      <p:pic>
+        <p:nvPicPr>
+          <p:cNvPr id="38" name="Рисунок 37" descr="photo_2026-01-12_20-04-50.jpg"/>
+          <p:cNvPicPr>
+            <a:picLocks noChangeAspect="1"/>
+          </p:cNvPicPr>
+          <p:nvPr/>
+        </p:nvPicPr>
+        <p:blipFill>
+          <a:blip r:embed="rId10" cstate="print"/>
+          <a:srcRect l="9744" r="6201"/>
+          <a:stretch>
+            <a:fillRect/>
+          </a:stretch>
+        </p:blipFill>
+        <p:spPr>
+          <a:xfrm>
+            <a:off x="5844876" y="4248169"/>
+            <a:ext cx="1742158" cy="1734217"/>
+          </a:xfrm>
+          <a:prstGeom prst="rect">
+            <a:avLst/>
+          </a:prstGeom>
+        </p:spPr>
+      </p:pic>
+      <p:pic>
+        <p:nvPicPr>
+          <p:cNvPr id="39" name="Рисунок 38" descr="photo_2026-01-12_20-05-10.jpg"/>
+          <p:cNvPicPr>
+            <a:picLocks noChangeAspect="1"/>
+          </p:cNvPicPr>
+          <p:nvPr/>
+        </p:nvPicPr>
+        <p:blipFill>
+          <a:blip r:embed="rId11" cstate="print"/>
+          <a:srcRect t="10630" r="57579" b="38976"/>
+          <a:stretch>
+            <a:fillRect/>
+          </a:stretch>
+        </p:blipFill>
+        <p:spPr>
+          <a:xfrm>
+            <a:off x="7896229" y="4218993"/>
+            <a:ext cx="1551590" cy="1843211"/>
+          </a:xfrm>
+          <a:prstGeom prst="rect">
+            <a:avLst/>
+          </a:prstGeom>
+        </p:spPr>
+      </p:pic>
+      <p:pic>
+        <p:nvPicPr>
+          <p:cNvPr id="40" name="Рисунок 39" descr="photo_2026-01-12_20-13-01.jpg"/>
+          <p:cNvPicPr>
+            <a:picLocks noChangeAspect="1"/>
+          </p:cNvPicPr>
+          <p:nvPr/>
+        </p:nvPicPr>
+        <p:blipFill>
+          <a:blip r:embed="rId12" cstate="print"/>
+          <a:srcRect l="29232" t="8858" r="35433" b="54921"/>
+          <a:stretch>
+            <a:fillRect/>
+          </a:stretch>
+        </p:blipFill>
+        <p:spPr>
+          <a:xfrm>
+            <a:off x="9661370" y="4208058"/>
+            <a:ext cx="1809378" cy="1854747"/>
           </a:xfrm>
           <a:prstGeom prst="rect">
             <a:avLst/>
@@ -15172,7 +15288,7 @@
         </p:nvSpPr>
         <p:spPr>
           <a:xfrm>
-            <a:off x="1333926" y="3192326"/>
+            <a:off x="1914951" y="3192326"/>
             <a:ext cx="2422568" cy="629392"/>
           </a:xfrm>
           <a:prstGeom prst="rect">
@@ -15285,7 +15401,11 @@
           <a:p>
             <a:r>
               <a:rPr lang="en-US" dirty="0" smtClean="0"/>
-              <a:t>COMPDS/EAD/CSS Course Team</a:t>
+              <a:t>COMPDS </a:t>
+            </a:r>
+            <a:r>
+              <a:rPr lang="en-US" dirty="0" smtClean="0"/>
+              <a:t>Course Team</a:t>
             </a:r>
             <a:endParaRPr lang="ru-RU" dirty="0"/>
           </a:p>
@@ -15308,7 +15428,7 @@
         </p:blipFill>
         <p:spPr>
           <a:xfrm>
-            <a:off x="1619031" y="1428489"/>
+            <a:off x="2247681" y="1428489"/>
             <a:ext cx="1861198" cy="1895752"/>
           </a:xfrm>
           <a:prstGeom prst="rect">
@@ -15326,7 +15446,7 @@
         </p:nvSpPr>
         <p:spPr>
           <a:xfrm>
-            <a:off x="848100" y="925748"/>
+            <a:off x="771900" y="925748"/>
             <a:ext cx="10515600" cy="700228"/>
           </a:xfrm>
           <a:prstGeom prst="rect">
@@ -15384,7 +15504,7 @@
         </p:nvSpPr>
         <p:spPr>
           <a:xfrm>
-            <a:off x="3748411" y="3204803"/>
+            <a:off x="4786636" y="3185753"/>
             <a:ext cx="2600797" cy="629392"/>
           </a:xfrm>
           <a:prstGeom prst="rect">
@@ -15400,12 +15520,20 @@
           <a:p>
             <a:pPr algn="ctr"/>
             <a:r>
+              <a:rPr lang="en-US" sz="2300" b="1" dirty="0" err="1" smtClean="0">
+                <a:solidFill>
+                  <a:srgbClr val="1E3272"/>
+                </a:solidFill>
+              </a:rPr>
+              <a:t>Ksenya</a:t>
+            </a:r>
+            <a:r>
               <a:rPr lang="en-US" sz="2300" b="1" dirty="0" smtClean="0">
                 <a:solidFill>
                   <a:srgbClr val="1E3272"/>
                 </a:solidFill>
               </a:rPr>
-              <a:t>Alexandra </a:t>
+              <a:t> </a:t>
             </a:r>
             <a:r>
               <a:rPr lang="en-US" sz="2300" b="1" dirty="0" err="1" smtClean="0">
@@ -15413,151 +15541,7 @@
                   <a:srgbClr val="1E3272"/>
                 </a:solidFill>
               </a:rPr>
-              <a:t>Borisova</a:t>
-            </a:r>
-            <a:endParaRPr lang="ru-RU" sz="2300" b="1" dirty="0" smtClean="0">
-              <a:solidFill>
-                <a:srgbClr val="1E3272"/>
-              </a:solidFill>
-            </a:endParaRPr>
-          </a:p>
-        </p:txBody>
-      </p:sp>
-      <p:pic>
-        <p:nvPicPr>
-          <p:cNvPr id="26" name="Рисунок 25" descr="IMG_8245.JPG"/>
-          <p:cNvPicPr>
-            <a:picLocks noChangeAspect="1"/>
-          </p:cNvPicPr>
-          <p:nvPr/>
-        </p:nvPicPr>
-        <p:blipFill>
-          <a:blip r:embed="rId3" cstate="print"/>
-          <a:srcRect t="973" b="24330"/>
-          <a:stretch>
-            <a:fillRect/>
-          </a:stretch>
-        </p:blipFill>
-        <p:spPr>
-          <a:xfrm>
-            <a:off x="4180280" y="1440603"/>
-            <a:ext cx="1678132" cy="1878946"/>
-          </a:xfrm>
-          <a:prstGeom prst="rect">
-            <a:avLst/>
-          </a:prstGeom>
-        </p:spPr>
-      </p:pic>
-      <p:pic>
-        <p:nvPicPr>
-          <p:cNvPr id="12" name="Рисунок 11" descr="photo_2024-01-10_17-28-04.jpg"/>
-          <p:cNvPicPr>
-            <a:picLocks noChangeAspect="1"/>
-          </p:cNvPicPr>
-          <p:nvPr/>
-        </p:nvPicPr>
-        <p:blipFill>
-          <a:blip r:embed="rId4" cstate="print"/>
-          <a:srcRect l="8858" t="11811" r="9449" b="2953"/>
-          <a:stretch>
-            <a:fillRect/>
-          </a:stretch>
-        </p:blipFill>
-        <p:spPr>
-          <a:xfrm>
-            <a:off x="6389242" y="1405848"/>
-            <a:ext cx="1842599" cy="1922515"/>
-          </a:xfrm>
-          <a:prstGeom prst="rect">
-            <a:avLst/>
-          </a:prstGeom>
-        </p:spPr>
-      </p:pic>
-      <p:sp>
-        <p:nvSpPr>
-          <p:cNvPr id="13" name="TextBox 12"/>
-          <p:cNvSpPr txBox="1"/>
-          <p:nvPr/>
-        </p:nvSpPr>
-        <p:spPr>
-          <a:xfrm>
-            <a:off x="6019879" y="3226575"/>
-            <a:ext cx="2600797" cy="629392"/>
-          </a:xfrm>
-          <a:prstGeom prst="rect">
-            <a:avLst/>
-          </a:prstGeom>
-          <a:noFill/>
-        </p:spPr>
-        <p:txBody>
-          <a:bodyPr wrap="square" lIns="72000" tIns="25200" rIns="0" bIns="25200" rtlCol="0" anchor="ctr" anchorCtr="0">
-            <a:noAutofit/>
-          </a:bodyPr>
-          <a:lstStyle/>
-          <a:p>
-            <a:pPr algn="ctr"/>
-            <a:r>
-              <a:rPr lang="en-US" sz="2300" b="1" dirty="0" smtClean="0">
-                <a:solidFill>
-                  <a:srgbClr val="1E3272"/>
-                </a:solidFill>
-              </a:rPr>
-              <a:t>Boris </a:t>
-            </a:r>
-            <a:r>
-              <a:rPr lang="en-US" sz="2300" b="1" dirty="0" err="1" smtClean="0">
-                <a:solidFill>
-                  <a:srgbClr val="1E3272"/>
-                </a:solidFill>
-              </a:rPr>
-              <a:t>Galitsky</a:t>
-            </a:r>
-            <a:endParaRPr lang="ru-RU" sz="2300" b="1" dirty="0" smtClean="0">
-              <a:solidFill>
-                <a:srgbClr val="1E3272"/>
-              </a:solidFill>
-            </a:endParaRPr>
-          </a:p>
-        </p:txBody>
-      </p:sp>
-      <p:sp>
-        <p:nvSpPr>
-          <p:cNvPr id="15" name="TextBox 14"/>
-          <p:cNvSpPr txBox="1"/>
-          <p:nvPr/>
-        </p:nvSpPr>
-        <p:spPr>
-          <a:xfrm>
-            <a:off x="8320391" y="3233834"/>
-            <a:ext cx="2600797" cy="629392"/>
-          </a:xfrm>
-          <a:prstGeom prst="rect">
-            <a:avLst/>
-          </a:prstGeom>
-          <a:noFill/>
-        </p:spPr>
-        <p:txBody>
-          <a:bodyPr wrap="square" lIns="72000" tIns="25200" rIns="0" bIns="25200" rtlCol="0" anchor="ctr" anchorCtr="0">
-            <a:noAutofit/>
-          </a:bodyPr>
-          <a:lstStyle/>
-          <a:p>
-            <a:pPr algn="ctr"/>
-            <a:r>
-              <a:rPr lang="en-US" sz="2300" b="1" dirty="0" smtClean="0">
-                <a:solidFill>
-                  <a:srgbClr val="1E3272"/>
-                </a:solidFill>
-              </a:rPr>
-              <a:t>Alexander </a:t>
-            </a:r>
-            <a:r>
-              <a:rPr lang="en-US" sz="2300" b="1" dirty="0" err="1" smtClean="0">
-                <a:solidFill>
-                  <a:srgbClr val="1E3272"/>
-                </a:solidFill>
-              </a:rPr>
-              <a:t>Eremin</a:t>
+              <a:t>Drozdova</a:t>
             </a:r>
             <a:endParaRPr lang="ru-RU" sz="2300" b="1" dirty="0" smtClean="0">
               <a:solidFill>
@@ -15575,7 +15559,7 @@
         </p:nvSpPr>
         <p:spPr>
           <a:xfrm>
-            <a:off x="1625573" y="5837308"/>
+            <a:off x="4016348" y="6008758"/>
             <a:ext cx="1912288" cy="490922"/>
           </a:xfrm>
           <a:prstGeom prst="rect">
@@ -15591,28 +15575,20 @@
           <a:p>
             <a:pPr algn="ctr"/>
             <a:r>
+              <a:rPr lang="en-US" b="1" dirty="0" smtClean="0">
+                <a:solidFill>
+                  <a:srgbClr val="1E3272"/>
+                </a:solidFill>
+              </a:rPr>
+              <a:t>Michael </a:t>
+            </a:r>
+            <a:r>
               <a:rPr lang="en-US" b="1" dirty="0" err="1" smtClean="0">
                 <a:solidFill>
                   <a:srgbClr val="1E3272"/>
                 </a:solidFill>
               </a:rPr>
-              <a:t>Vadim</a:t>
-            </a:r>
-            <a:r>
-              <a:rPr lang="en-US" b="1" dirty="0" smtClean="0">
-                <a:solidFill>
-                  <a:srgbClr val="1E3272"/>
-                </a:solidFill>
-              </a:rPr>
-              <a:t> </a:t>
-            </a:r>
-            <a:r>
-              <a:rPr lang="en-US" b="1" dirty="0" err="1" smtClean="0">
-                <a:solidFill>
-                  <a:srgbClr val="1E3272"/>
-                </a:solidFill>
-              </a:rPr>
-              <a:t>Vasilyev</a:t>
+              <a:t>Artemov</a:t>
             </a:r>
             <a:endParaRPr lang="ru-RU" b="1" dirty="0" smtClean="0">
               <a:solidFill>
@@ -15622,90 +15598,15 @@
           </a:p>
         </p:txBody>
       </p:sp>
-      <p:pic>
-        <p:nvPicPr>
-          <p:cNvPr id="32" name="Рисунок 31" descr="IMG_3881.JPEG"/>
-          <p:cNvPicPr>
-            <a:picLocks noChangeAspect="1"/>
-          </p:cNvPicPr>
-          <p:nvPr/>
-        </p:nvPicPr>
-        <p:blipFill>
-          <a:blip r:embed="rId5" cstate="print"/>
-          <a:srcRect l="27874" t="11339" r="22677" b="39685"/>
-          <a:stretch>
-            <a:fillRect/>
-          </a:stretch>
-        </p:blipFill>
-        <p:spPr>
-          <a:xfrm>
-            <a:off x="8560083" y="1390048"/>
-            <a:ext cx="1959362" cy="1940625"/>
-          </a:xfrm>
-          <a:prstGeom prst="rect">
-            <a:avLst/>
-          </a:prstGeom>
-        </p:spPr>
-      </p:pic>
-      <p:pic>
-        <p:nvPicPr>
-          <p:cNvPr id="33" name="Рисунок 32" descr="photo_2025-01-12_23-07-53.jpg"/>
-          <p:cNvPicPr>
-            <a:picLocks noChangeAspect="1"/>
-          </p:cNvPicPr>
-          <p:nvPr/>
-        </p:nvPicPr>
-        <p:blipFill>
-          <a:blip r:embed="rId6" cstate="print"/>
-          <a:srcRect l="14736" t="2640" r="10914" b="34083"/>
-          <a:stretch>
-            <a:fillRect/>
-          </a:stretch>
-        </p:blipFill>
-        <p:spPr>
-          <a:xfrm>
-            <a:off x="1785201" y="4220591"/>
-            <a:ext cx="1633368" cy="1708331"/>
-          </a:xfrm>
-          <a:prstGeom prst="rect">
-            <a:avLst/>
-          </a:prstGeom>
-        </p:spPr>
-      </p:pic>
-      <p:pic>
-        <p:nvPicPr>
-          <p:cNvPr id="16" name="Рисунок 15" descr="photo_2025-01-12_23-19-57.jpg"/>
-          <p:cNvPicPr>
-            <a:picLocks noChangeAspect="1"/>
-          </p:cNvPicPr>
-          <p:nvPr/>
-        </p:nvPicPr>
-        <p:blipFill>
-          <a:blip r:embed="rId7" cstate="print"/>
-          <a:srcRect t="16831" r="4019" b="6865"/>
-          <a:stretch>
-            <a:fillRect/>
-          </a:stretch>
-        </p:blipFill>
-        <p:spPr>
-          <a:xfrm>
-            <a:off x="5366524" y="4216855"/>
-            <a:ext cx="1564899" cy="1736557"/>
-          </a:xfrm>
-          <a:prstGeom prst="rect">
-            <a:avLst/>
-          </a:prstGeom>
-        </p:spPr>
-      </p:pic>
       <p:sp>
         <p:nvSpPr>
-          <p:cNvPr id="17" name="TextBox 16"/>
+          <p:cNvPr id="18" name="TextBox 17"/>
           <p:cNvSpPr txBox="1"/>
           <p:nvPr/>
         </p:nvSpPr>
         <p:spPr>
           <a:xfrm>
-            <a:off x="5174249" y="5859082"/>
+            <a:off x="6453808" y="5961127"/>
             <a:ext cx="1912288" cy="490922"/>
           </a:xfrm>
           <a:prstGeom prst="rect">
@@ -15721,20 +15622,20 @@
           <a:p>
             <a:pPr algn="ctr"/>
             <a:r>
+              <a:rPr lang="en-US" b="1" dirty="0" err="1" smtClean="0">
+                <a:solidFill>
+                  <a:srgbClr val="1E3272"/>
+                </a:solidFill>
+              </a:rPr>
+              <a:t>Arkady</a:t>
+            </a:r>
+            <a:r>
               <a:rPr lang="en-US" b="1" dirty="0" smtClean="0">
                 <a:solidFill>
                   <a:srgbClr val="1E3272"/>
                 </a:solidFill>
               </a:rPr>
-              <a:t>Andrei </a:t>
-            </a:r>
-            <a:r>
-              <a:rPr lang="en-US" b="1" dirty="0" err="1" smtClean="0">
-                <a:solidFill>
-                  <a:srgbClr val="1E3272"/>
-                </a:solidFill>
-              </a:rPr>
-              <a:t>Polischuk</a:t>
+              <a:t> Pavlov</a:t>
             </a:r>
             <a:endParaRPr lang="ru-RU" b="1" dirty="0" smtClean="0">
               <a:solidFill>
@@ -15746,14 +15647,14 @@
       </p:sp>
       <p:sp>
         <p:nvSpPr>
-          <p:cNvPr id="18" name="TextBox 17"/>
+          <p:cNvPr id="20" name="TextBox 19"/>
           <p:cNvSpPr txBox="1"/>
           <p:nvPr/>
         </p:nvSpPr>
         <p:spPr>
           <a:xfrm>
-            <a:off x="3396283" y="5837302"/>
-            <a:ext cx="1912288" cy="490922"/>
+            <a:off x="7676700" y="3248336"/>
+            <a:ext cx="2380341" cy="490922"/>
           </a:xfrm>
           <a:prstGeom prst="rect">
             <a:avLst/>
@@ -15768,15 +15669,15 @@
           <a:p>
             <a:pPr algn="ctr"/>
             <a:r>
-              <a:rPr lang="en-US" b="1" dirty="0" err="1" smtClean="0">
+              <a:rPr lang="en-US" sz="2300" b="1" dirty="0" err="1" smtClean="0">
                 <a:solidFill>
                   <a:srgbClr val="1E3272"/>
                 </a:solidFill>
               </a:rPr>
-              <a:t>Pavel</a:t>
-            </a:r>
-            <a:r>
-              <a:rPr lang="en-US" b="1" dirty="0" smtClean="0">
+              <a:t>Fedor</a:t>
+            </a:r>
+            <a:r>
+              <a:rPr lang="en-US" sz="2300" b="1" dirty="0" smtClean="0">
                 <a:solidFill>
                   <a:srgbClr val="1E3272"/>
                 </a:solidFill>
@@ -15784,14 +15685,14 @@
               <a:t> </a:t>
             </a:r>
             <a:r>
-              <a:rPr lang="en-US" b="1" dirty="0" err="1" smtClean="0">
+              <a:rPr lang="en-US" sz="2300" b="1" dirty="0" err="1" smtClean="0">
                 <a:solidFill>
                   <a:srgbClr val="1E3272"/>
                 </a:solidFill>
               </a:rPr>
-              <a:t>Malov</a:t>
-            </a:r>
-            <a:endParaRPr lang="ru-RU" b="1" dirty="0" smtClean="0">
+              <a:t>Pakhurov</a:t>
+            </a:r>
+            <a:endParaRPr lang="ru-RU" sz="2300" b="1" dirty="0" smtClean="0">
               <a:solidFill>
                 <a:srgbClr val="1E3272"/>
               </a:solidFill>
@@ -15801,23 +15702,98 @@
       </p:sp>
       <p:pic>
         <p:nvPicPr>
-          <p:cNvPr id="19" name="Рисунок 18" descr="photo_2025-01-12_23-27-55.jpg"/>
+          <p:cNvPr id="22" name="Рисунок 21" descr="IMG_6901.jpg"/>
           <p:cNvPicPr>
             <a:picLocks noChangeAspect="1"/>
           </p:cNvPicPr>
           <p:nvPr/>
         </p:nvPicPr>
         <p:blipFill>
-          <a:blip r:embed="rId8" cstate="print"/>
-          <a:srcRect l="28346" t="8194" r="9449" b="43406"/>
+          <a:blip r:embed="rId3" cstate="print"/>
+          <a:srcRect l="4076" t="18363" r="4076" b="6121"/>
           <a:stretch>
             <a:fillRect/>
           </a:stretch>
         </p:blipFill>
         <p:spPr>
           <a:xfrm>
-            <a:off x="3566217" y="4224119"/>
-            <a:ext cx="1668449" cy="1730942"/>
+            <a:off x="8027472" y="1415731"/>
+            <a:ext cx="1687352" cy="1847576"/>
+          </a:xfrm>
+          <a:prstGeom prst="rect">
+            <a:avLst/>
+          </a:prstGeom>
+        </p:spPr>
+      </p:pic>
+      <p:pic>
+        <p:nvPicPr>
+          <p:cNvPr id="23" name="Рисунок 22" descr="photo_2026-01-12_19-28-31.jpg"/>
+          <p:cNvPicPr>
+            <a:picLocks noChangeAspect="1"/>
+          </p:cNvPicPr>
+          <p:nvPr/>
+        </p:nvPicPr>
+        <p:blipFill>
+          <a:blip r:embed="rId4" cstate="print"/>
+          <a:srcRect l="3336" t="6459" r="4449" b="8612"/>
+          <a:stretch>
+            <a:fillRect/>
+          </a:stretch>
+        </p:blipFill>
+        <p:spPr>
+          <a:xfrm>
+            <a:off x="5047386" y="1419197"/>
+            <a:ext cx="1970085" cy="1874468"/>
+          </a:xfrm>
+          <a:prstGeom prst="rect">
+            <a:avLst/>
+          </a:prstGeom>
+        </p:spPr>
+      </p:pic>
+      <p:pic>
+        <p:nvPicPr>
+          <p:cNvPr id="25" name="Рисунок 24" descr="photo_2026-01-12_19-34-39.jpg"/>
+          <p:cNvPicPr>
+            <a:picLocks noChangeAspect="1"/>
+          </p:cNvPicPr>
+          <p:nvPr/>
+        </p:nvPicPr>
+        <p:blipFill>
+          <a:blip r:embed="rId5" cstate="print"/>
+          <a:srcRect l="9154" t="29454" r="39567" b="34547"/>
+          <a:stretch>
+            <a:fillRect/>
+          </a:stretch>
+        </p:blipFill>
+        <p:spPr>
+          <a:xfrm>
+            <a:off x="4131069" y="4300239"/>
+            <a:ext cx="1813061" cy="1697052"/>
+          </a:xfrm>
+          <a:prstGeom prst="rect">
+            <a:avLst/>
+          </a:prstGeom>
+        </p:spPr>
+      </p:pic>
+      <p:pic>
+        <p:nvPicPr>
+          <p:cNvPr id="28" name="Рисунок 27" descr="IMG_6898.JPG"/>
+          <p:cNvPicPr>
+            <a:picLocks noChangeAspect="1"/>
+          </p:cNvPicPr>
+          <p:nvPr/>
+        </p:nvPicPr>
+        <p:blipFill>
+          <a:blip r:embed="rId6" cstate="print"/>
+          <a:srcRect t="11866"/>
+          <a:stretch>
+            <a:fillRect/>
+          </a:stretch>
+        </p:blipFill>
+        <p:spPr>
+          <a:xfrm>
+            <a:off x="6486543" y="4304398"/>
+            <a:ext cx="1911350" cy="1684549"/>
           </a:xfrm>
           <a:prstGeom prst="rect">
             <a:avLst/>
@@ -16347,7 +16323,7 @@
           <a:effectLst/>
           <a:extLst>
             <a:ext uri="{91240B29-F687-4F45-9708-019B960494DF}">
-              <a14:hiddenLine xmlns="" xmlns:a14="http://schemas.microsoft.com/office/drawing/2010/main" w="9525">
+              <a14:hiddenLine xmlns:a14="http://schemas.microsoft.com/office/drawing/2010/main" xmlns="" w="9525">
                 <a:solidFill>
                   <a:schemeClr val="tx1"/>
                 </a:solidFill>
@@ -16357,7 +16333,7 @@
               </a14:hiddenLine>
             </a:ext>
             <a:ext uri="{AF507438-7753-43E0-B8FC-AC1667EBCBE1}">
-              <a14:hiddenEffects xmlns="" xmlns:a14="http://schemas.microsoft.com/office/drawing/2010/main">
+              <a14:hiddenEffects xmlns:a14="http://schemas.microsoft.com/office/drawing/2010/main" xmlns="">
                 <a:effectLst>
                   <a:outerShdw dist="35921" dir="2700000" algn="ctr" rotWithShape="0">
                     <a:schemeClr val="bg2"/>
@@ -17929,7 +17905,7 @@
           <a:effectLst/>
           <a:extLst>
             <a:ext uri="{91240B29-F687-4F45-9708-019B960494DF}">
-              <a14:hiddenLine xmlns="" xmlns:a14="http://schemas.microsoft.com/office/drawing/2010/main" w="9525">
+              <a14:hiddenLine xmlns:a14="http://schemas.microsoft.com/office/drawing/2010/main" xmlns="" w="9525">
                 <a:solidFill>
                   <a:schemeClr val="tx1"/>
                 </a:solidFill>
@@ -17939,7 +17915,7 @@
               </a14:hiddenLine>
             </a:ext>
             <a:ext uri="{AF507438-7753-43E0-B8FC-AC1667EBCBE1}">
-              <a14:hiddenEffects xmlns="" xmlns:a14="http://schemas.microsoft.com/office/drawing/2010/main">
+              <a14:hiddenEffects xmlns:a14="http://schemas.microsoft.com/office/drawing/2010/main" xmlns="">
                 <a:effectLst>
                   <a:outerShdw dist="35921" dir="2700000" algn="ctr" rotWithShape="0">
                     <a:schemeClr val="bg2"/>
@@ -17988,7 +17964,7 @@
         </p:txBody>
       </p:sp>
       <mc:AlternateContent xmlns:mc="http://schemas.openxmlformats.org/markup-compatibility/2006">
-        <mc:Choice xmlns="" xmlns:a14="http://schemas.microsoft.com/office/drawing/2010/main" Requires="a14">
+        <mc:Choice xmlns:a14="http://schemas.microsoft.com/office/drawing/2010/main" xmlns="" Requires="a14">
           <p:sp>
             <p:nvSpPr>
               <p:cNvPr id="8" name="Содержимое 1"/>
@@ -18467,7 +18443,7 @@
     </p:spTree>
     <p:extLst>
       <p:ext uri="{BB962C8B-B14F-4D97-AF65-F5344CB8AC3E}">
-        <p14:creationId xmlns="" xmlns:p14="http://schemas.microsoft.com/office/powerpoint/2010/main" val="611271091"/>
+        <p14:creationId xmlns:p14="http://schemas.microsoft.com/office/powerpoint/2010/main" xmlns="" val="611271091"/>
       </p:ext>
     </p:extLst>
   </p:cSld>
@@ -18592,7 +18568,7 @@
           <a:effectLst/>
           <a:extLst>
             <a:ext uri="{91240B29-F687-4F45-9708-019B960494DF}">
-              <a14:hiddenLine xmlns="" xmlns:a14="http://schemas.microsoft.com/office/drawing/2010/main" w="9525">
+              <a14:hiddenLine xmlns:a14="http://schemas.microsoft.com/office/drawing/2010/main" xmlns="" w="9525">
                 <a:solidFill>
                   <a:schemeClr val="tx1"/>
                 </a:solidFill>
@@ -18602,7 +18578,7 @@
               </a14:hiddenLine>
             </a:ext>
             <a:ext uri="{AF507438-7753-43E0-B8FC-AC1667EBCBE1}">
-              <a14:hiddenEffects xmlns="" xmlns:a14="http://schemas.microsoft.com/office/drawing/2010/main">
+              <a14:hiddenEffects xmlns:a14="http://schemas.microsoft.com/office/drawing/2010/main" xmlns="">
                 <a:effectLst>
                   <a:outerShdw dist="35921" dir="2700000" algn="ctr" rotWithShape="0">
                     <a:schemeClr val="bg2"/>
@@ -20522,7 +20498,7 @@
         </p:txBody>
       </p:sp>
       <mc:AlternateContent xmlns:mc="http://schemas.openxmlformats.org/markup-compatibility/2006">
-        <mc:Choice xmlns="" xmlns:a14="http://schemas.microsoft.com/office/drawing/2010/main" Requires="a14">
+        <mc:Choice xmlns:a14="http://schemas.microsoft.com/office/drawing/2010/main" xmlns="" Requires="a14">
           <p:sp>
             <p:nvSpPr>
               <p:cNvPr id="6" name="Содержимое 1"/>
@@ -21001,7 +20977,7 @@
     </p:spTree>
     <p:extLst>
       <p:ext uri="{BB962C8B-B14F-4D97-AF65-F5344CB8AC3E}">
-        <p14:creationId xmlns="" xmlns:p14="http://schemas.microsoft.com/office/powerpoint/2010/main" val="476216845"/>
+        <p14:creationId xmlns:p14="http://schemas.microsoft.com/office/powerpoint/2010/main" xmlns="" val="476216845"/>
       </p:ext>
     </p:extLst>
   </p:cSld>
@@ -22999,7 +22975,7 @@
         </p:txBody>
       </p:sp>
       <mc:AlternateContent xmlns:mc="http://schemas.openxmlformats.org/markup-compatibility/2006">
-        <mc:Choice xmlns="" xmlns:a14="http://schemas.microsoft.com/office/drawing/2010/main" Requires="a14">
+        <mc:Choice xmlns:a14="http://schemas.microsoft.com/office/drawing/2010/main" xmlns="" Requires="a14">
           <p:sp>
             <p:nvSpPr>
               <p:cNvPr id="8" name="Содержимое 1"/>
@@ -23493,7 +23469,7 @@
     </p:spTree>
     <p:extLst>
       <p:ext uri="{BB962C8B-B14F-4D97-AF65-F5344CB8AC3E}">
-        <p14:creationId xmlns="" xmlns:p14="http://schemas.microsoft.com/office/powerpoint/2010/main" val="3690992376"/>
+        <p14:creationId xmlns:p14="http://schemas.microsoft.com/office/powerpoint/2010/main" xmlns="" val="3690992376"/>
       </p:ext>
     </p:extLst>
   </p:cSld>
@@ -23785,7 +23761,7 @@
   <a:extraClrSchemeLst/>
   <a:extLst>
     <a:ext uri="{05A4C25C-085E-4340-85A3-A5531E510DB2}">
-      <thm15:themeFamily xmlns="" xmlns:thm15="http://schemas.microsoft.com/office/thememl/2012/main" name="Office Theme" id="{62F939B6-93AF-4DB8-9C6B-D6C7DFDC589F}" vid="{4A3C46E8-61CC-4603-A589-7422A47A8E4A}"/>
+      <thm15:themeFamily xmlns:thm15="http://schemas.microsoft.com/office/thememl/2012/main" xmlns="" name="Office Theme" id="{62F939B6-93AF-4DB8-9C6B-D6C7DFDC589F}" vid="{4A3C46E8-61CC-4603-A589-7422A47A8E4A}"/>
     </a:ext>
   </a:extLst>
 </a:theme>
@@ -24046,7 +24022,7 @@
   <a:extraClrSchemeLst/>
   <a:extLst>
     <a:ext uri="{05A4C25C-085E-4340-85A3-A5531E510DB2}">
-      <thm15:themeFamily xmlns="" xmlns:thm15="http://schemas.microsoft.com/office/thememl/2012/main" name="Office Theme" id="{62F939B6-93AF-4DB8-9C6B-D6C7DFDC589F}" vid="{4A3C46E8-61CC-4603-A589-7422A47A8E4A}"/>
+      <thm15:themeFamily xmlns:thm15="http://schemas.microsoft.com/office/thememl/2012/main" xmlns="" name="Office Theme" id="{62F939B6-93AF-4DB8-9C6B-D6C7DFDC589F}" vid="{4A3C46E8-61CC-4603-A589-7422A47A8E4A}"/>
     </a:ext>
   </a:extLst>
 </a:theme>
@@ -24307,7 +24283,7 @@
   <a:extraClrSchemeLst/>
   <a:extLst>
     <a:ext uri="{05A4C25C-085E-4340-85A3-A5531E510DB2}">
-      <thm15:themeFamily xmlns="" xmlns:thm15="http://schemas.microsoft.com/office/thememl/2012/main" name="Office Theme" id="{62F939B6-93AF-4DB8-9C6B-D6C7DFDC589F}" vid="{4A3C46E8-61CC-4603-A589-7422A47A8E4A}"/>
+      <thm15:themeFamily xmlns:thm15="http://schemas.microsoft.com/office/thememl/2012/main" xmlns="" name="Office Theme" id="{62F939B6-93AF-4DB8-9C6B-D6C7DFDC589F}" vid="{4A3C46E8-61CC-4603-A589-7422A47A8E4A}"/>
     </a:ext>
   </a:extLst>
 </a:theme>

--- a/docs/part1ca/01_Introduction/CA_Lecture_01.pptx
+++ b/docs/part1ca/01_Introduction/CA_Lecture_01.pptx
@@ -12300,9 +12300,15 @@
               <a:rPr lang="en-US" sz="2800" dirty="0" smtClean="0">
                 <a:hlinkClick r:id="rId3"/>
               </a:rPr>
-              <a:t>http://wiki.cs.hse.ru/ACOS_DSBA_2024/25</a:t>
-            </a:r>
-            <a:endParaRPr lang="en-US" sz="2800" dirty="0"/>
+              <a:t>http://</a:t>
+            </a:r>
+            <a:r>
+              <a:rPr lang="en-US" sz="2800" dirty="0" smtClean="0">
+                <a:hlinkClick r:id="rId3"/>
+              </a:rPr>
+              <a:t>wiki.cs.hse.ru/Computer_Architecture_and_Operating_Systems_DSBA_2025/2026</a:t>
+            </a:r>
+            <a:endParaRPr lang="en-US" sz="2800" dirty="0" smtClean="0"/>
           </a:p>
           <a:p>
             <a:pPr>
@@ -12318,11 +12324,15 @@
               <a:rPr lang="en-US" sz="2800" dirty="0" smtClean="0">
                 <a:hlinkClick r:id="rId4"/>
               </a:rPr>
-              <a:t>http://wiki.cs.hse.ru/ACOS_COMPDS_2024/2025</a:t>
-            </a:r>
-            <a:endParaRPr lang="en-US" sz="2800" dirty="0">
-              <a:hlinkClick r:id="rId2"/>
-            </a:endParaRPr>
+              <a:t>http://</a:t>
+            </a:r>
+            <a:r>
+              <a:rPr lang="en-US" sz="2800" dirty="0" smtClean="0">
+                <a:hlinkClick r:id="rId4"/>
+              </a:rPr>
+              <a:t>wiki.cs.hse.ru/ACOS_COMPDS_2025/26</a:t>
+            </a:r>
+            <a:endParaRPr lang="en-US" sz="2800" dirty="0" smtClean="0"/>
           </a:p>
           <a:p>
             <a:pPr>
@@ -12330,13 +12340,14 @@
                 <a:spcPct val="120000"/>
               </a:lnSpc>
               <a:spcBef>
-                <a:spcPts val="600"/>
+                <a:spcPts val="0"/>
               </a:spcBef>
             </a:pPr>
             <a:r>
               <a:rPr lang="en-US" sz="4200" b="1" dirty="0" smtClean="0"/>
               <a:t>Telegram</a:t>
             </a:r>
+            <a:endParaRPr lang="en-US" sz="4200" b="1" dirty="0" smtClean="0"/>
           </a:p>
           <a:p>
             <a:pPr>
@@ -12352,11 +12363,25 @@
               <a:rPr lang="en-US" sz="2800" dirty="0" smtClean="0">
                 <a:hlinkClick r:id="rId5"/>
               </a:rPr>
-              <a:t>https://t.me/+wRC-TJXoI9M0ZmFi</a:t>
+              <a:t>https://t.me/+</a:t>
+            </a:r>
+            <a:r>
+              <a:rPr lang="en-US" sz="2800" dirty="0" smtClean="0">
+                <a:hlinkClick r:id="rId5"/>
+              </a:rPr>
+              <a:t>Dg8icpqPvABjMzUy</a:t>
             </a:r>
             <a:r>
               <a:rPr lang="en-US" sz="2800" dirty="0" smtClean="0"/>
-              <a:t> (DSBA)</a:t>
+              <a:t> </a:t>
+            </a:r>
+            <a:r>
+              <a:rPr lang="en-US" sz="2800" dirty="0" smtClean="0"/>
+              <a:t>(</a:t>
+            </a:r>
+            <a:r>
+              <a:rPr lang="en-US" sz="2800" dirty="0" smtClean="0"/>
+              <a:t>DSBA)</a:t>
             </a:r>
           </a:p>
           <a:p>
@@ -12373,19 +12398,31 @@
               <a:rPr lang="en-US" sz="2800" dirty="0" smtClean="0">
                 <a:hlinkClick r:id="rId6"/>
               </a:rPr>
-              <a:t>https://t.me/+gTIDlXK1e3MyZjcy</a:t>
+              <a:t>https://t.me</a:t>
+            </a:r>
+            <a:r>
+              <a:rPr lang="en-US" sz="2800" smtClean="0">
+                <a:hlinkClick r:id="rId6"/>
+              </a:rPr>
+              <a:t>/+</a:t>
+            </a:r>
+            <a:r>
+              <a:rPr lang="en-US" sz="2800" smtClean="0">
+                <a:hlinkClick r:id="rId6"/>
+              </a:rPr>
+              <a:t>fMUlZaLRVyg4ZTc6</a:t>
+            </a:r>
+            <a:r>
+              <a:rPr lang="en-US" sz="2800" smtClean="0"/>
+              <a:t> (</a:t>
             </a:r>
             <a:r>
               <a:rPr lang="en-US" sz="2800" dirty="0" smtClean="0"/>
-              <a:t> </a:t>
-            </a:r>
-            <a:r>
-              <a:rPr lang="en-US" sz="2800" dirty="0"/>
-              <a:t>(</a:t>
+              <a:t>COMPDS</a:t>
             </a:r>
             <a:r>
               <a:rPr lang="en-US" sz="2800" dirty="0" smtClean="0"/>
-              <a:t>COMPDS/EAD/VSN)</a:t>
+              <a:t>)</a:t>
             </a:r>
             <a:endParaRPr lang="en-US" sz="2800" dirty="0"/>
           </a:p>
@@ -14533,7 +14570,7 @@
         </p:nvSpPr>
         <p:spPr>
           <a:xfrm>
-            <a:off x="873826" y="3731499"/>
+            <a:off x="873826" y="3702924"/>
             <a:ext cx="10515600" cy="560155"/>
           </a:xfrm>
         </p:spPr>
@@ -14569,7 +14606,12 @@
             <p:ph type="sldNum" sz="quarter" idx="12"/>
           </p:nvPr>
         </p:nvSpPr>
-        <p:spPr/>
+        <p:spPr>
+          <a:xfrm>
+            <a:off x="10795081" y="6209988"/>
+            <a:ext cx="594673" cy="479419"/>
+          </a:xfrm>
+        </p:spPr>
         <p:txBody>
           <a:bodyPr/>
           <a:lstStyle/>
@@ -14747,7 +14789,7 @@
         </p:nvSpPr>
         <p:spPr>
           <a:xfrm>
-            <a:off x="1936999" y="5967131"/>
+            <a:off x="1936999" y="5919506"/>
             <a:ext cx="2257640" cy="408521"/>
           </a:xfrm>
           <a:prstGeom prst="rect">
@@ -14794,7 +14836,7 @@
         </p:nvSpPr>
         <p:spPr>
           <a:xfrm>
-            <a:off x="173828" y="5970045"/>
+            <a:off x="145253" y="5855745"/>
             <a:ext cx="1928227" cy="408521"/>
           </a:xfrm>
           <a:prstGeom prst="rect">
@@ -15115,7 +15157,7 @@
         </p:blipFill>
         <p:spPr>
           <a:xfrm>
-            <a:off x="457200" y="4238632"/>
+            <a:off x="457200" y="4076707"/>
             <a:ext cx="1463040" cy="1777925"/>
           </a:xfrm>
           <a:prstGeom prst="rect">
@@ -15140,7 +15182,7 @@
         </p:blipFill>
         <p:spPr>
           <a:xfrm>
-            <a:off x="2258120" y="4253761"/>
+            <a:off x="2258120" y="4206136"/>
             <a:ext cx="1564951" cy="1750108"/>
           </a:xfrm>
           <a:prstGeom prst="rect">
@@ -15165,7 +15207,7 @@
         </p:blipFill>
         <p:spPr>
           <a:xfrm>
-            <a:off x="4203218" y="4237001"/>
+            <a:off x="4269893" y="4398926"/>
             <a:ext cx="1407236" cy="1721405"/>
           </a:xfrm>
           <a:prstGeom prst="rect">
@@ -15190,7 +15232,7 @@
         </p:blipFill>
         <p:spPr>
           <a:xfrm>
-            <a:off x="5844876" y="4248169"/>
+            <a:off x="5844876" y="4200544"/>
             <a:ext cx="1742158" cy="1734217"/>
           </a:xfrm>
           <a:prstGeom prst="rect">
@@ -15215,7 +15257,7 @@
         </p:blipFill>
         <p:spPr>
           <a:xfrm>
-            <a:off x="7896229" y="4218993"/>
+            <a:off x="7896229" y="4171368"/>
             <a:ext cx="1551590" cy="1843211"/>
           </a:xfrm>
           <a:prstGeom prst="rect">
@@ -15240,7 +15282,7 @@
         </p:blipFill>
         <p:spPr>
           <a:xfrm>
-            <a:off x="9661370" y="4208058"/>
+            <a:off x="9661370" y="4046133"/>
             <a:ext cx="1809378" cy="1854747"/>
           </a:xfrm>
           <a:prstGeom prst="rect">
@@ -15248,6 +15290,194 @@
           </a:prstGeom>
         </p:spPr>
       </p:pic>
+      <p:sp>
+        <p:nvSpPr>
+          <p:cNvPr id="42" name="TextBox 41"/>
+          <p:cNvSpPr txBox="1"/>
+          <p:nvPr/>
+        </p:nvSpPr>
+        <p:spPr>
+          <a:xfrm>
+            <a:off x="5537449" y="6014756"/>
+            <a:ext cx="2257640" cy="408521"/>
+          </a:xfrm>
+          <a:prstGeom prst="rect">
+            <a:avLst/>
+          </a:prstGeom>
+          <a:noFill/>
+        </p:spPr>
+        <p:txBody>
+          <a:bodyPr wrap="square" lIns="72000" tIns="25200" rIns="0" bIns="25200" rtlCol="0" anchor="ctr" anchorCtr="0">
+            <a:noAutofit/>
+          </a:bodyPr>
+          <a:lstStyle/>
+          <a:p>
+            <a:pPr algn="ctr"/>
+            <a:r>
+              <a:rPr lang="en-US" sz="2000" b="1" dirty="0" smtClean="0">
+                <a:solidFill>
+                  <a:srgbClr val="1E3272"/>
+                </a:solidFill>
+              </a:rPr>
+              <a:t>Irina </a:t>
+            </a:r>
+            <a:r>
+              <a:rPr lang="en-US" sz="2000" b="1" dirty="0" err="1" smtClean="0">
+                <a:solidFill>
+                  <a:srgbClr val="1E3272"/>
+                </a:solidFill>
+              </a:rPr>
+              <a:t>Milova</a:t>
+            </a:r>
+            <a:endParaRPr lang="ru-RU" sz="2000" b="1" dirty="0" smtClean="0">
+              <a:solidFill>
+                <a:srgbClr val="1E3272"/>
+              </a:solidFill>
+            </a:endParaRPr>
+          </a:p>
+        </p:txBody>
+      </p:sp>
+      <p:sp>
+        <p:nvSpPr>
+          <p:cNvPr id="44" name="TextBox 43"/>
+          <p:cNvSpPr txBox="1"/>
+          <p:nvPr/>
+        </p:nvSpPr>
+        <p:spPr>
+          <a:xfrm>
+            <a:off x="7499599" y="6024281"/>
+            <a:ext cx="2257640" cy="408521"/>
+          </a:xfrm>
+          <a:prstGeom prst="rect">
+            <a:avLst/>
+          </a:prstGeom>
+          <a:noFill/>
+        </p:spPr>
+        <p:txBody>
+          <a:bodyPr wrap="square" lIns="72000" tIns="25200" rIns="0" bIns="25200" rtlCol="0" anchor="ctr" anchorCtr="0">
+            <a:noAutofit/>
+          </a:bodyPr>
+          <a:lstStyle/>
+          <a:p>
+            <a:pPr algn="ctr"/>
+            <a:r>
+              <a:rPr lang="en-US" sz="2000" b="1" dirty="0" smtClean="0">
+                <a:solidFill>
+                  <a:srgbClr val="1E3272"/>
+                </a:solidFill>
+              </a:rPr>
+              <a:t>Jamal </a:t>
+            </a:r>
+            <a:r>
+              <a:rPr lang="en-US" sz="2000" b="1" dirty="0" err="1" smtClean="0">
+                <a:solidFill>
+                  <a:srgbClr val="1E3272"/>
+                </a:solidFill>
+              </a:rPr>
+              <a:t>Verdiyev</a:t>
+            </a:r>
+            <a:endParaRPr lang="ru-RU" sz="2000" b="1" dirty="0" smtClean="0">
+              <a:solidFill>
+                <a:srgbClr val="1E3272"/>
+              </a:solidFill>
+            </a:endParaRPr>
+          </a:p>
+        </p:txBody>
+      </p:sp>
+      <p:sp>
+        <p:nvSpPr>
+          <p:cNvPr id="45" name="TextBox 44"/>
+          <p:cNvSpPr txBox="1"/>
+          <p:nvPr/>
+        </p:nvSpPr>
+        <p:spPr>
+          <a:xfrm>
+            <a:off x="9423649" y="5862356"/>
+            <a:ext cx="2257640" cy="408521"/>
+          </a:xfrm>
+          <a:prstGeom prst="rect">
+            <a:avLst/>
+          </a:prstGeom>
+          <a:noFill/>
+        </p:spPr>
+        <p:txBody>
+          <a:bodyPr wrap="square" lIns="72000" tIns="25200" rIns="0" bIns="25200" rtlCol="0" anchor="ctr" anchorCtr="0">
+            <a:noAutofit/>
+          </a:bodyPr>
+          <a:lstStyle/>
+          <a:p>
+            <a:pPr algn="ctr"/>
+            <a:r>
+              <a:rPr lang="en-US" sz="2000" b="1" dirty="0" smtClean="0">
+                <a:solidFill>
+                  <a:srgbClr val="1E3272"/>
+                </a:solidFill>
+              </a:rPr>
+              <a:t>Michael </a:t>
+            </a:r>
+            <a:r>
+              <a:rPr lang="en-US" sz="2000" b="1" dirty="0" err="1" smtClean="0">
+                <a:solidFill>
+                  <a:srgbClr val="1E3272"/>
+                </a:solidFill>
+              </a:rPr>
+              <a:t>Korchagin</a:t>
+            </a:r>
+            <a:endParaRPr lang="ru-RU" sz="2000" b="1" dirty="0" smtClean="0">
+              <a:solidFill>
+                <a:srgbClr val="1E3272"/>
+              </a:solidFill>
+            </a:endParaRPr>
+          </a:p>
+        </p:txBody>
+      </p:sp>
+      <p:sp>
+        <p:nvSpPr>
+          <p:cNvPr id="46" name="TextBox 45"/>
+          <p:cNvSpPr txBox="1"/>
+          <p:nvPr/>
+        </p:nvSpPr>
+        <p:spPr>
+          <a:xfrm>
+            <a:off x="3727699" y="6271931"/>
+            <a:ext cx="2663576" cy="408521"/>
+          </a:xfrm>
+          <a:prstGeom prst="rect">
+            <a:avLst/>
+          </a:prstGeom>
+          <a:noFill/>
+        </p:spPr>
+        <p:txBody>
+          <a:bodyPr wrap="square" lIns="72000" tIns="25200" rIns="0" bIns="25200" rtlCol="0" anchor="ctr" anchorCtr="0">
+            <a:noAutofit/>
+          </a:bodyPr>
+          <a:lstStyle/>
+          <a:p>
+            <a:pPr algn="ctr"/>
+            <a:r>
+              <a:rPr lang="en-US" sz="2000" b="1" dirty="0" smtClean="0">
+                <a:solidFill>
+                  <a:srgbClr val="1E3272"/>
+                </a:solidFill>
+              </a:rPr>
+              <a:t>Alexander </a:t>
+            </a:r>
+            <a:r>
+              <a:rPr lang="en-US" sz="2000" b="1" dirty="0" err="1" smtClean="0">
+                <a:solidFill>
+                  <a:srgbClr val="1E3272"/>
+                </a:solidFill>
+              </a:rPr>
+              <a:t>Pokrovsky</a:t>
+            </a:r>
+            <a:endParaRPr lang="ru-RU" sz="2000" b="1" dirty="0" smtClean="0">
+              <a:solidFill>
+                <a:srgbClr val="1E3272"/>
+              </a:solidFill>
+            </a:endParaRPr>
+          </a:p>
+        </p:txBody>
+      </p:sp>
     </p:spTree>
   </p:cSld>
   <p:clrMapOvr>

--- a/docs/part1ca/01_Introduction/CA_Lecture_01.pptx
+++ b/docs/part1ca/01_Introduction/CA_Lecture_01.pptx
@@ -137,7 +137,7 @@
   </p:defaultTextStyle>
   <p:extLst>
     <p:ext uri="{EFAFB233-063F-42B5-8137-9DF3F51BA10A}">
-      <p15:sldGuideLst xmlns:p15="http://schemas.microsoft.com/office/powerpoint/2012/main" xmlns="">
+      <p15:sldGuideLst xmlns="" xmlns:p15="http://schemas.microsoft.com/office/powerpoint/2012/main">
         <p15:guide id="1" orient="horz" pos="2160">
           <p15:clr>
             <a:srgbClr val="A4A3A4"/>
@@ -151,7 +151,7 @@
       </p15:sldGuideLst>
     </p:ext>
     <p:ext uri="{2D200454-40CA-4A62-9FC3-DE9A4176ACB9}">
-      <p15:notesGuideLst xmlns:p15="http://schemas.microsoft.com/office/powerpoint/2012/main" xmlns="">
+      <p15:notesGuideLst xmlns="" xmlns:p15="http://schemas.microsoft.com/office/powerpoint/2012/main">
         <p15:guide id="1" orient="horz" pos="2880">
           <p15:clr>
             <a:srgbClr val="A4A3A4"/>
@@ -259,7 +259,7 @@
             <a:fld id="{D0106195-8D78-4F6F-B8E4-FA67975ACEF5}" type="datetimeFigureOut">
               <a:rPr lang="ru-RU" smtClean="0"/>
               <a:pPr/>
-              <a:t>12.01.2026</a:t>
+              <a:t>23.01.2026</a:t>
             </a:fld>
             <a:endParaRPr lang="ru-RU"/>
           </a:p>
@@ -335,7 +335,7 @@
     </p:spTree>
     <p:extLst>
       <p:ext uri="{BB962C8B-B14F-4D97-AF65-F5344CB8AC3E}">
-        <p14:creationId xmlns:p14="http://schemas.microsoft.com/office/powerpoint/2010/main" xmlns="" val="827279973"/>
+        <p14:creationId xmlns="" xmlns:p14="http://schemas.microsoft.com/office/powerpoint/2010/main" val="827279973"/>
       </p:ext>
     </p:extLst>
   </p:cSld>
@@ -427,7 +427,7 @@
             <a:fld id="{878212F1-C3D9-4F2B-8F42-5E960FE8BE51}" type="datetimeFigureOut">
               <a:rPr lang="ru-RU" smtClean="0"/>
               <a:pPr/>
-              <a:t>12.01.2026</a:t>
+              <a:t>23.01.2026</a:t>
             </a:fld>
             <a:endParaRPr lang="ru-RU"/>
           </a:p>
@@ -596,7 +596,7 @@
     </p:spTree>
     <p:extLst>
       <p:ext uri="{BB962C8B-B14F-4D97-AF65-F5344CB8AC3E}">
-        <p14:creationId xmlns:p14="http://schemas.microsoft.com/office/powerpoint/2010/main" xmlns="" val="3865021395"/>
+        <p14:creationId xmlns="" xmlns:p14="http://schemas.microsoft.com/office/powerpoint/2010/main" val="3865021395"/>
       </p:ext>
     </p:extLst>
   </p:cSld>
@@ -810,7 +810,7 @@
     </p:spTree>
     <p:extLst>
       <p:ext uri="{BB962C8B-B14F-4D97-AF65-F5344CB8AC3E}">
-        <p14:creationId xmlns:p14="http://schemas.microsoft.com/office/powerpoint/2010/main" xmlns="" val="2381791527"/>
+        <p14:creationId xmlns="" xmlns:p14="http://schemas.microsoft.com/office/powerpoint/2010/main" val="2381791527"/>
       </p:ext>
     </p:extLst>
   </p:cSld>
@@ -933,7 +933,7 @@
     </p:spTree>
     <p:extLst>
       <p:ext uri="{BB962C8B-B14F-4D97-AF65-F5344CB8AC3E}">
-        <p14:creationId xmlns:p14="http://schemas.microsoft.com/office/powerpoint/2010/main" xmlns="" val="1915950851"/>
+        <p14:creationId xmlns="" xmlns:p14="http://schemas.microsoft.com/office/powerpoint/2010/main" val="1915950851"/>
       </p:ext>
     </p:extLst>
   </p:cSld>
@@ -1193,7 +1193,7 @@
     </p:spTree>
     <p:extLst>
       <p:ext uri="{BB962C8B-B14F-4D97-AF65-F5344CB8AC3E}">
-        <p14:creationId xmlns:p14="http://schemas.microsoft.com/office/powerpoint/2010/main" xmlns="" val="322455162"/>
+        <p14:creationId xmlns="" xmlns:p14="http://schemas.microsoft.com/office/powerpoint/2010/main" val="322455162"/>
       </p:ext>
     </p:extLst>
   </p:cSld>
@@ -1367,7 +1367,7 @@
     </p:spTree>
     <p:extLst>
       <p:ext uri="{BB962C8B-B14F-4D97-AF65-F5344CB8AC3E}">
-        <p14:creationId xmlns:p14="http://schemas.microsoft.com/office/powerpoint/2010/main" xmlns="" val="971117636"/>
+        <p14:creationId xmlns="" xmlns:p14="http://schemas.microsoft.com/office/powerpoint/2010/main" val="971117636"/>
       </p:ext>
     </p:extLst>
   </p:cSld>
@@ -1544,7 +1544,7 @@
     </p:spTree>
     <p:extLst>
       <p:ext uri="{BB962C8B-B14F-4D97-AF65-F5344CB8AC3E}">
-        <p14:creationId xmlns:p14="http://schemas.microsoft.com/office/powerpoint/2010/main" xmlns="" val="3348877825"/>
+        <p14:creationId xmlns="" xmlns:p14="http://schemas.microsoft.com/office/powerpoint/2010/main" val="3348877825"/>
       </p:ext>
     </p:extLst>
   </p:cSld>
@@ -1869,7 +1869,7 @@
     </p:spTree>
     <p:extLst>
       <p:ext uri="{BB962C8B-B14F-4D97-AF65-F5344CB8AC3E}">
-        <p14:creationId xmlns:p14="http://schemas.microsoft.com/office/powerpoint/2010/main" xmlns="" val="3256953994"/>
+        <p14:creationId xmlns="" xmlns:p14="http://schemas.microsoft.com/office/powerpoint/2010/main" val="3256953994"/>
       </p:ext>
     </p:extLst>
   </p:cSld>
@@ -2119,7 +2119,7 @@
     </p:spTree>
     <p:extLst>
       <p:ext uri="{BB962C8B-B14F-4D97-AF65-F5344CB8AC3E}">
-        <p14:creationId xmlns:p14="http://schemas.microsoft.com/office/powerpoint/2010/main" xmlns="" val="3067076846"/>
+        <p14:creationId xmlns="" xmlns:p14="http://schemas.microsoft.com/office/powerpoint/2010/main" val="3067076846"/>
       </p:ext>
     </p:extLst>
   </p:cSld>
@@ -2355,7 +2355,7 @@
     </p:spTree>
     <p:extLst>
       <p:ext uri="{BB962C8B-B14F-4D97-AF65-F5344CB8AC3E}">
-        <p14:creationId xmlns:p14="http://schemas.microsoft.com/office/powerpoint/2010/main" xmlns="" val="3710015975"/>
+        <p14:creationId xmlns="" xmlns:p14="http://schemas.microsoft.com/office/powerpoint/2010/main" val="3710015975"/>
       </p:ext>
     </p:extLst>
   </p:cSld>
@@ -2726,7 +2726,7 @@
     </p:spTree>
     <p:extLst>
       <p:ext uri="{BB962C8B-B14F-4D97-AF65-F5344CB8AC3E}">
-        <p14:creationId xmlns:p14="http://schemas.microsoft.com/office/powerpoint/2010/main" xmlns="" val="4075590966"/>
+        <p14:creationId xmlns="" xmlns:p14="http://schemas.microsoft.com/office/powerpoint/2010/main" val="4075590966"/>
       </p:ext>
     </p:extLst>
   </p:cSld>
@@ -2848,7 +2848,7 @@
     </p:spTree>
     <p:extLst>
       <p:ext uri="{BB962C8B-B14F-4D97-AF65-F5344CB8AC3E}">
-        <p14:creationId xmlns:p14="http://schemas.microsoft.com/office/powerpoint/2010/main" xmlns="" val="2889604898"/>
+        <p14:creationId xmlns="" xmlns:p14="http://schemas.microsoft.com/office/powerpoint/2010/main" val="2889604898"/>
       </p:ext>
     </p:extLst>
   </p:cSld>
@@ -2947,7 +2947,7 @@
     </p:spTree>
     <p:extLst>
       <p:ext uri="{BB962C8B-B14F-4D97-AF65-F5344CB8AC3E}">
-        <p14:creationId xmlns:p14="http://schemas.microsoft.com/office/powerpoint/2010/main" xmlns="" val="152384765"/>
+        <p14:creationId xmlns="" xmlns:p14="http://schemas.microsoft.com/office/powerpoint/2010/main" val="152384765"/>
       </p:ext>
     </p:extLst>
   </p:cSld>
@@ -3228,7 +3228,7 @@
     </p:spTree>
     <p:extLst>
       <p:ext uri="{BB962C8B-B14F-4D97-AF65-F5344CB8AC3E}">
-        <p14:creationId xmlns:p14="http://schemas.microsoft.com/office/powerpoint/2010/main" xmlns="" val="2127791886"/>
+        <p14:creationId xmlns="" xmlns:p14="http://schemas.microsoft.com/office/powerpoint/2010/main" val="2127791886"/>
       </p:ext>
     </p:extLst>
   </p:cSld>
@@ -3485,7 +3485,7 @@
     </p:spTree>
     <p:extLst>
       <p:ext uri="{BB962C8B-B14F-4D97-AF65-F5344CB8AC3E}">
-        <p14:creationId xmlns:p14="http://schemas.microsoft.com/office/powerpoint/2010/main" xmlns="" val="1752705130"/>
+        <p14:creationId xmlns="" xmlns:p14="http://schemas.microsoft.com/office/powerpoint/2010/main" val="1752705130"/>
       </p:ext>
     </p:extLst>
   </p:cSld>
@@ -3738,7 +3738,7 @@
     </p:spTree>
     <p:extLst>
       <p:ext uri="{BB962C8B-B14F-4D97-AF65-F5344CB8AC3E}">
-        <p14:creationId xmlns:p14="http://schemas.microsoft.com/office/powerpoint/2010/main" xmlns="" val="968833914"/>
+        <p14:creationId xmlns="" xmlns:p14="http://schemas.microsoft.com/office/powerpoint/2010/main" val="968833914"/>
       </p:ext>
     </p:extLst>
   </p:cSld>
@@ -4215,7 +4215,7 @@
     </p:spTree>
     <p:extLst>
       <p:ext uri="{BB962C8B-B14F-4D97-AF65-F5344CB8AC3E}">
-        <p14:creationId xmlns:p14="http://schemas.microsoft.com/office/powerpoint/2010/main" xmlns="" val="2492894732"/>
+        <p14:creationId xmlns="" xmlns:p14="http://schemas.microsoft.com/office/powerpoint/2010/main" val="2492894732"/>
       </p:ext>
     </p:extLst>
   </p:cSld>
@@ -6515,7 +6515,7 @@
     </p:spTree>
     <p:extLst>
       <p:ext uri="{BB962C8B-B14F-4D97-AF65-F5344CB8AC3E}">
-        <p14:creationId xmlns:p14="http://schemas.microsoft.com/office/powerpoint/2010/main" xmlns="" val="2808821390"/>
+        <p14:creationId xmlns="" xmlns:p14="http://schemas.microsoft.com/office/powerpoint/2010/main" val="2808821390"/>
       </p:ext>
     </p:extLst>
   </p:cSld>
@@ -6559,7 +6559,7 @@
             <p:ph idx="1"/>
             <p:extLst>
               <p:ext uri="{D42A27DB-BD31-4B8C-83A1-F6EECF244321}">
-                <p14:modId xmlns:p14="http://schemas.microsoft.com/office/powerpoint/2010/main" xmlns="" val="2853019934"/>
+                <p14:modId xmlns="" xmlns:p14="http://schemas.microsoft.com/office/powerpoint/2010/main" val="2853019934"/>
               </p:ext>
             </p:extLst>
           </p:nvPr>
@@ -6993,7 +6993,7 @@
         </p:txBody>
       </p:sp>
       <mc:AlternateContent xmlns:mc="http://schemas.openxmlformats.org/markup-compatibility/2006">
-        <mc:Choice xmlns:a14="http://schemas.microsoft.com/office/drawing/2010/main" xmlns="" Requires="a14">
+        <mc:Choice xmlns="" xmlns:a14="http://schemas.microsoft.com/office/drawing/2010/main" Requires="a14">
           <p:sp>
             <p:nvSpPr>
               <p:cNvPr id="6" name="Rectangle 5"/>
@@ -7184,7 +7184,7 @@
     </p:spTree>
     <p:extLst>
       <p:ext uri="{BB962C8B-B14F-4D97-AF65-F5344CB8AC3E}">
-        <p14:creationId xmlns:p14="http://schemas.microsoft.com/office/powerpoint/2010/main" xmlns="" val="1319878854"/>
+        <p14:creationId xmlns="" xmlns:p14="http://schemas.microsoft.com/office/powerpoint/2010/main" val="1319878854"/>
       </p:ext>
     </p:extLst>
   </p:cSld>
@@ -7276,7 +7276,7 @@
             <p:ph idx="1"/>
             <p:extLst>
               <p:ext uri="{D42A27DB-BD31-4B8C-83A1-F6EECF244321}">
-                <p14:modId xmlns:p14="http://schemas.microsoft.com/office/powerpoint/2010/main" xmlns="" val="895195415"/>
+                <p14:modId xmlns="" xmlns:p14="http://schemas.microsoft.com/office/powerpoint/2010/main" val="895195415"/>
               </p:ext>
             </p:extLst>
           </p:nvPr>
@@ -7580,7 +7580,7 @@
     </p:spTree>
     <p:extLst>
       <p:ext uri="{BB962C8B-B14F-4D97-AF65-F5344CB8AC3E}">
-        <p14:creationId xmlns:p14="http://schemas.microsoft.com/office/powerpoint/2010/main" xmlns="" val="1991606056"/>
+        <p14:creationId xmlns="" xmlns:p14="http://schemas.microsoft.com/office/powerpoint/2010/main" val="1991606056"/>
       </p:ext>
     </p:extLst>
   </p:cSld>
@@ -7748,7 +7748,7 @@
           <a:blip r:embed="rId2" cstate="print">
             <a:extLst>
               <a:ext uri="{28A0092B-C50C-407E-A947-70E740481C1C}">
-                <a14:useLocalDpi xmlns:a14="http://schemas.microsoft.com/office/drawing/2010/main" xmlns="" val="0"/>
+                <a14:useLocalDpi xmlns="" xmlns:a14="http://schemas.microsoft.com/office/drawing/2010/main" val="0"/>
               </a:ext>
             </a:extLst>
           </a:blip>
@@ -7768,7 +7768,7 @@
           <a:noFill/>
           <a:extLst>
             <a:ext uri="{909E8E84-426E-40DD-AFC4-6F175D3DCCD1}">
-              <a14:hiddenFill xmlns:a14="http://schemas.microsoft.com/office/drawing/2010/main" xmlns="">
+              <a14:hiddenFill xmlns="" xmlns:a14="http://schemas.microsoft.com/office/drawing/2010/main">
                 <a:solidFill>
                   <a:srgbClr val="FFFFFF"/>
                 </a:solidFill>
@@ -7780,7 +7780,7 @@
     </p:spTree>
     <p:extLst>
       <p:ext uri="{BB962C8B-B14F-4D97-AF65-F5344CB8AC3E}">
-        <p14:creationId xmlns:p14="http://schemas.microsoft.com/office/powerpoint/2010/main" xmlns="" val="1147934676"/>
+        <p14:creationId xmlns="" xmlns:p14="http://schemas.microsoft.com/office/powerpoint/2010/main" val="1147934676"/>
       </p:ext>
     </p:extLst>
   </p:cSld>
@@ -8678,7 +8678,7 @@
           <a:blip r:embed="rId2" cstate="print">
             <a:extLst>
               <a:ext uri="{28A0092B-C50C-407E-A947-70E740481C1C}">
-                <a14:useLocalDpi xmlns:a14="http://schemas.microsoft.com/office/drawing/2010/main" xmlns="" val="0"/>
+                <a14:useLocalDpi xmlns="" xmlns:a14="http://schemas.microsoft.com/office/drawing/2010/main" val="0"/>
               </a:ext>
             </a:extLst>
           </a:blip>
@@ -8698,7 +8698,7 @@
           <a:noFill/>
           <a:extLst>
             <a:ext uri="{909E8E84-426E-40DD-AFC4-6F175D3DCCD1}">
-              <a14:hiddenFill xmlns:a14="http://schemas.microsoft.com/office/drawing/2010/main" xmlns="">
+              <a14:hiddenFill xmlns="" xmlns:a14="http://schemas.microsoft.com/office/drawing/2010/main">
                 <a:solidFill>
                   <a:srgbClr val="FFFFFF"/>
                 </a:solidFill>
@@ -8710,7 +8710,7 @@
     </p:spTree>
     <p:extLst>
       <p:ext uri="{BB962C8B-B14F-4D97-AF65-F5344CB8AC3E}">
-        <p14:creationId xmlns:p14="http://schemas.microsoft.com/office/powerpoint/2010/main" xmlns="" val="2950914556"/>
+        <p14:creationId xmlns="" xmlns:p14="http://schemas.microsoft.com/office/powerpoint/2010/main" val="2950914556"/>
       </p:ext>
     </p:extLst>
   </p:cSld>
@@ -8756,7 +8756,7 @@
           <a:blip r:embed="rId2" cstate="print">
             <a:extLst>
               <a:ext uri="{28A0092B-C50C-407E-A947-70E740481C1C}">
-                <a14:useLocalDpi xmlns:a14="http://schemas.microsoft.com/office/drawing/2010/main" xmlns="" val="0"/>
+                <a14:useLocalDpi xmlns="" xmlns:a14="http://schemas.microsoft.com/office/drawing/2010/main" val="0"/>
               </a:ext>
             </a:extLst>
           </a:blip>
@@ -8776,7 +8776,7 @@
           <a:noFill/>
           <a:extLst>
             <a:ext uri="{909E8E84-426E-40DD-AFC4-6F175D3DCCD1}">
-              <a14:hiddenFill xmlns:a14="http://schemas.microsoft.com/office/drawing/2010/main" xmlns="">
+              <a14:hiddenFill xmlns="" xmlns:a14="http://schemas.microsoft.com/office/drawing/2010/main">
                 <a:solidFill>
                   <a:srgbClr val="FFFFFF"/>
                 </a:solidFill>
@@ -9349,7 +9349,7 @@
     </p:spTree>
     <p:extLst>
       <p:ext uri="{BB962C8B-B14F-4D97-AF65-F5344CB8AC3E}">
-        <p14:creationId xmlns:p14="http://schemas.microsoft.com/office/powerpoint/2010/main" xmlns="" val="4087179089"/>
+        <p14:creationId xmlns="" xmlns:p14="http://schemas.microsoft.com/office/powerpoint/2010/main" val="4087179089"/>
       </p:ext>
     </p:extLst>
   </p:cSld>
@@ -9555,7 +9555,7 @@
           <a:blip r:embed="rId2" cstate="print">
             <a:extLst>
               <a:ext uri="{28A0092B-C50C-407E-A947-70E740481C1C}">
-                <a14:useLocalDpi xmlns:a14="http://schemas.microsoft.com/office/drawing/2010/main" xmlns="" val="0"/>
+                <a14:useLocalDpi xmlns="" xmlns:a14="http://schemas.microsoft.com/office/drawing/2010/main" val="0"/>
               </a:ext>
             </a:extLst>
           </a:blip>
@@ -9575,7 +9575,7 @@
           <a:noFill/>
           <a:extLst>
             <a:ext uri="{909E8E84-426E-40DD-AFC4-6F175D3DCCD1}">
-              <a14:hiddenFill xmlns:a14="http://schemas.microsoft.com/office/drawing/2010/main" xmlns="">
+              <a14:hiddenFill xmlns="" xmlns:a14="http://schemas.microsoft.com/office/drawing/2010/main">
                 <a:solidFill>
                   <a:srgbClr val="FFFFFF"/>
                 </a:solidFill>
@@ -9596,7 +9596,7 @@
           <a:blip r:embed="rId3" cstate="print">
             <a:extLst>
               <a:ext uri="{28A0092B-C50C-407E-A947-70E740481C1C}">
-                <a14:useLocalDpi xmlns:a14="http://schemas.microsoft.com/office/drawing/2010/main" xmlns="" val="0"/>
+                <a14:useLocalDpi xmlns="" xmlns:a14="http://schemas.microsoft.com/office/drawing/2010/main" val="0"/>
               </a:ext>
             </a:extLst>
           </a:blip>
@@ -9616,7 +9616,7 @@
           <a:noFill/>
           <a:extLst>
             <a:ext uri="{909E8E84-426E-40DD-AFC4-6F175D3DCCD1}">
-              <a14:hiddenFill xmlns:a14="http://schemas.microsoft.com/office/drawing/2010/main" xmlns="">
+              <a14:hiddenFill xmlns="" xmlns:a14="http://schemas.microsoft.com/office/drawing/2010/main">
                 <a:solidFill>
                   <a:srgbClr val="FFFFFF"/>
                 </a:solidFill>
@@ -9628,7 +9628,7 @@
     </p:spTree>
     <p:extLst>
       <p:ext uri="{BB962C8B-B14F-4D97-AF65-F5344CB8AC3E}">
-        <p14:creationId xmlns:p14="http://schemas.microsoft.com/office/powerpoint/2010/main" xmlns="" val="4020093932"/>
+        <p14:creationId xmlns="" xmlns:p14="http://schemas.microsoft.com/office/powerpoint/2010/main" val="4020093932"/>
       </p:ext>
     </p:extLst>
   </p:cSld>
@@ -9841,7 +9841,7 @@
           <a:blip r:embed="rId2" cstate="print">
             <a:extLst>
               <a:ext uri="{28A0092B-C50C-407E-A947-70E740481C1C}">
-                <a14:useLocalDpi xmlns:a14="http://schemas.microsoft.com/office/drawing/2010/main" xmlns="" val="0"/>
+                <a14:useLocalDpi xmlns="" xmlns:a14="http://schemas.microsoft.com/office/drawing/2010/main" val="0"/>
               </a:ext>
             </a:extLst>
           </a:blip>
@@ -9864,14 +9864,14 @@
           </a:ln>
           <a:extLst>
             <a:ext uri="{909E8E84-426E-40DD-AFC4-6F175D3DCCD1}">
-              <a14:hiddenFill xmlns:a14="http://schemas.microsoft.com/office/drawing/2010/main" xmlns="">
+              <a14:hiddenFill xmlns="" xmlns:a14="http://schemas.microsoft.com/office/drawing/2010/main">
                 <a:solidFill>
                   <a:srgbClr val="FFFFFF"/>
                 </a:solidFill>
               </a14:hiddenFill>
             </a:ext>
             <a:ext uri="{91240B29-F687-4F45-9708-019B960494DF}">
-              <a14:hiddenLine xmlns:a14="http://schemas.microsoft.com/office/drawing/2010/main" xmlns="" w="9525">
+              <a14:hiddenLine xmlns="" xmlns:a14="http://schemas.microsoft.com/office/drawing/2010/main" w="9525">
                 <a:solidFill>
                   <a:srgbClr val="000000"/>
                 </a:solidFill>
@@ -9886,7 +9886,7 @@
     </p:spTree>
     <p:extLst>
       <p:ext uri="{BB962C8B-B14F-4D97-AF65-F5344CB8AC3E}">
-        <p14:creationId xmlns:p14="http://schemas.microsoft.com/office/powerpoint/2010/main" xmlns="" val="3856844071"/>
+        <p14:creationId xmlns="" xmlns:p14="http://schemas.microsoft.com/office/powerpoint/2010/main" val="3856844071"/>
       </p:ext>
     </p:extLst>
   </p:cSld>
@@ -9932,7 +9932,7 @@
           <a:blip r:embed="rId2" cstate="print">
             <a:extLst>
               <a:ext uri="{28A0092B-C50C-407E-A947-70E740481C1C}">
-                <a14:useLocalDpi xmlns:a14="http://schemas.microsoft.com/office/drawing/2010/main" xmlns="" val="0"/>
+                <a14:useLocalDpi xmlns="" xmlns:a14="http://schemas.microsoft.com/office/drawing/2010/main" val="0"/>
               </a:ext>
             </a:extLst>
           </a:blip>
@@ -9955,14 +9955,14 @@
           </a:ln>
           <a:extLst>
             <a:ext uri="{909E8E84-426E-40DD-AFC4-6F175D3DCCD1}">
-              <a14:hiddenFill xmlns:a14="http://schemas.microsoft.com/office/drawing/2010/main" xmlns="">
+              <a14:hiddenFill xmlns="" xmlns:a14="http://schemas.microsoft.com/office/drawing/2010/main">
                 <a:solidFill>
                   <a:srgbClr val="FFFFFF"/>
                 </a:solidFill>
               </a14:hiddenFill>
             </a:ext>
             <a:ext uri="{91240B29-F687-4F45-9708-019B960494DF}">
-              <a14:hiddenLine xmlns:a14="http://schemas.microsoft.com/office/drawing/2010/main" xmlns="" w="9525">
+              <a14:hiddenLine xmlns="" xmlns:a14="http://schemas.microsoft.com/office/drawing/2010/main" w="9525">
                 <a:solidFill>
                   <a:srgbClr val="000000"/>
                 </a:solidFill>
@@ -10468,7 +10468,7 @@
           <p:nvPr>
             <p:extLst>
               <p:ext uri="{D42A27DB-BD31-4B8C-83A1-F6EECF244321}">
-                <p14:modId xmlns:p14="http://schemas.microsoft.com/office/powerpoint/2010/main" xmlns="" val="1213753623"/>
+                <p14:modId xmlns="" xmlns:p14="http://schemas.microsoft.com/office/powerpoint/2010/main" val="1213753623"/>
               </p:ext>
             </p:extLst>
           </p:nvPr>
@@ -12181,7 +12181,7 @@
     </p:spTree>
     <p:extLst>
       <p:ext uri="{BB962C8B-B14F-4D97-AF65-F5344CB8AC3E}">
-        <p14:creationId xmlns:p14="http://schemas.microsoft.com/office/powerpoint/2010/main" xmlns="" val="1153504515"/>
+        <p14:creationId xmlns="" xmlns:p14="http://schemas.microsoft.com/office/powerpoint/2010/main" val="1153504515"/>
       </p:ext>
     </p:extLst>
   </p:cSld>
@@ -12300,13 +12300,7 @@
               <a:rPr lang="en-US" sz="2800" dirty="0" smtClean="0">
                 <a:hlinkClick r:id="rId3"/>
               </a:rPr>
-              <a:t>http://</a:t>
-            </a:r>
-            <a:r>
-              <a:rPr lang="en-US" sz="2800" dirty="0" smtClean="0">
-                <a:hlinkClick r:id="rId3"/>
-              </a:rPr>
-              <a:t>wiki.cs.hse.ru/Computer_Architecture_and_Operating_Systems_DSBA_2025/2026</a:t>
+              <a:t>http://wiki.cs.hse.ru/Computer_Architecture_and_Operating_Systems_DSBA_2025/2026</a:t>
             </a:r>
             <a:endParaRPr lang="en-US" sz="2800" dirty="0" smtClean="0"/>
           </a:p>
@@ -12324,13 +12318,7 @@
               <a:rPr lang="en-US" sz="2800" dirty="0" smtClean="0">
                 <a:hlinkClick r:id="rId4"/>
               </a:rPr>
-              <a:t>http://</a:t>
-            </a:r>
-            <a:r>
-              <a:rPr lang="en-US" sz="2800" dirty="0" smtClean="0">
-                <a:hlinkClick r:id="rId4"/>
-              </a:rPr>
-              <a:t>wiki.cs.hse.ru/ACOS_COMPDS_2025/26</a:t>
+              <a:t>http://wiki.cs.hse.ru/ACOS_COMPDS_2025/26</a:t>
             </a:r>
             <a:endParaRPr lang="en-US" sz="2800" dirty="0" smtClean="0"/>
           </a:p>
@@ -12347,7 +12335,6 @@
               <a:rPr lang="en-US" sz="4200" b="1" dirty="0" smtClean="0"/>
               <a:t>Telegram</a:t>
             </a:r>
-            <a:endParaRPr lang="en-US" sz="4200" b="1" dirty="0" smtClean="0"/>
           </a:p>
           <a:p>
             <a:pPr>
@@ -12363,25 +12350,11 @@
               <a:rPr lang="en-US" sz="2800" dirty="0" smtClean="0">
                 <a:hlinkClick r:id="rId5"/>
               </a:rPr>
-              <a:t>https://t.me/+</a:t>
-            </a:r>
-            <a:r>
-              <a:rPr lang="en-US" sz="2800" dirty="0" smtClean="0">
-                <a:hlinkClick r:id="rId5"/>
-              </a:rPr>
-              <a:t>Dg8icpqPvABjMzUy</a:t>
+              <a:t>https://t.me/+Dg8icpqPvABjMzUy</a:t>
             </a:r>
             <a:r>
               <a:rPr lang="en-US" sz="2800" dirty="0" smtClean="0"/>
-              <a:t> </a:t>
-            </a:r>
-            <a:r>
-              <a:rPr lang="en-US" sz="2800" dirty="0" smtClean="0"/>
-              <a:t>(</a:t>
-            </a:r>
-            <a:r>
-              <a:rPr lang="en-US" sz="2800" dirty="0" smtClean="0"/>
-              <a:t>DSBA)</a:t>
+              <a:t> (DSBA)</a:t>
             </a:r>
           </a:p>
           <a:p>
@@ -12404,13 +12377,7 @@
               <a:rPr lang="en-US" sz="2800" smtClean="0">
                 <a:hlinkClick r:id="rId6"/>
               </a:rPr>
-              <a:t>/+</a:t>
-            </a:r>
-            <a:r>
-              <a:rPr lang="en-US" sz="2800" smtClean="0">
-                <a:hlinkClick r:id="rId6"/>
-              </a:rPr>
-              <a:t>fMUlZaLRVyg4ZTc6</a:t>
+              <a:t>/+fMUlZaLRVyg4ZTc6</a:t>
             </a:r>
             <a:r>
               <a:rPr lang="en-US" sz="2800" smtClean="0"/>
@@ -12418,11 +12385,7 @@
             </a:r>
             <a:r>
               <a:rPr lang="en-US" sz="2800" dirty="0" smtClean="0"/>
-              <a:t>COMPDS</a:t>
-            </a:r>
-            <a:r>
-              <a:rPr lang="en-US" sz="2800" dirty="0" smtClean="0"/>
-              <a:t>)</a:t>
+              <a:t>COMPDS)</a:t>
             </a:r>
             <a:endParaRPr lang="en-US" sz="2800" dirty="0"/>
           </a:p>
@@ -12668,7 +12631,7 @@
     </p:spTree>
     <p:extLst>
       <p:ext uri="{BB962C8B-B14F-4D97-AF65-F5344CB8AC3E}">
-        <p14:creationId xmlns:p14="http://schemas.microsoft.com/office/powerpoint/2010/main" xmlns="" val="664014649"/>
+        <p14:creationId xmlns="" xmlns:p14="http://schemas.microsoft.com/office/powerpoint/2010/main" val="664014649"/>
       </p:ext>
     </p:extLst>
   </p:cSld>
@@ -13073,7 +13036,7 @@
     </p:spTree>
     <p:extLst>
       <p:ext uri="{BB962C8B-B14F-4D97-AF65-F5344CB8AC3E}">
-        <p14:creationId xmlns:p14="http://schemas.microsoft.com/office/powerpoint/2010/main" xmlns="" val="1974197127"/>
+        <p14:creationId xmlns="" xmlns:p14="http://schemas.microsoft.com/office/powerpoint/2010/main" val="1974197127"/>
       </p:ext>
     </p:extLst>
   </p:cSld>
@@ -13167,7 +13130,7 @@
           <a:blip r:embed="rId2" cstate="print">
             <a:extLst>
               <a:ext uri="{28A0092B-C50C-407E-A947-70E740481C1C}">
-                <a14:useLocalDpi xmlns:a14="http://schemas.microsoft.com/office/drawing/2010/main" xmlns="" val="0"/>
+                <a14:useLocalDpi xmlns="" xmlns:a14="http://schemas.microsoft.com/office/drawing/2010/main" val="0"/>
               </a:ext>
             </a:extLst>
           </a:blip>
@@ -13190,14 +13153,14 @@
           </a:ln>
           <a:extLst>
             <a:ext uri="{909E8E84-426E-40DD-AFC4-6F175D3DCCD1}">
-              <a14:hiddenFill xmlns:a14="http://schemas.microsoft.com/office/drawing/2010/main" xmlns="">
+              <a14:hiddenFill xmlns="" xmlns:a14="http://schemas.microsoft.com/office/drawing/2010/main">
                 <a:solidFill>
                   <a:srgbClr val="FFFFFF"/>
                 </a:solidFill>
               </a14:hiddenFill>
             </a:ext>
             <a:ext uri="{91240B29-F687-4F45-9708-019B960494DF}">
-              <a14:hiddenLine xmlns:a14="http://schemas.microsoft.com/office/drawing/2010/main" xmlns="" w="9525">
+              <a14:hiddenLine xmlns="" xmlns:a14="http://schemas.microsoft.com/office/drawing/2010/main" w="9525">
                 <a:solidFill>
                   <a:srgbClr val="000000"/>
                 </a:solidFill>
@@ -13212,7 +13175,7 @@
     </p:spTree>
     <p:extLst>
       <p:ext uri="{BB962C8B-B14F-4D97-AF65-F5344CB8AC3E}">
-        <p14:creationId xmlns:p14="http://schemas.microsoft.com/office/powerpoint/2010/main" xmlns="" val="2270459329"/>
+        <p14:creationId xmlns="" xmlns:p14="http://schemas.microsoft.com/office/powerpoint/2010/main" val="2270459329"/>
       </p:ext>
     </p:extLst>
   </p:cSld>
@@ -13321,7 +13284,7 @@
     </p:spTree>
     <p:extLst>
       <p:ext uri="{BB962C8B-B14F-4D97-AF65-F5344CB8AC3E}">
-        <p14:creationId xmlns:p14="http://schemas.microsoft.com/office/powerpoint/2010/main" xmlns="" val="4095291685"/>
+        <p14:creationId xmlns="" xmlns:p14="http://schemas.microsoft.com/office/powerpoint/2010/main" val="4095291685"/>
       </p:ext>
     </p:extLst>
   </p:cSld>
@@ -13584,7 +13547,7 @@
     </p:spTree>
     <p:extLst>
       <p:ext uri="{BB962C8B-B14F-4D97-AF65-F5344CB8AC3E}">
-        <p14:creationId xmlns:p14="http://schemas.microsoft.com/office/powerpoint/2010/main" xmlns="" val="1324819286"/>
+        <p14:creationId xmlns="" xmlns:p14="http://schemas.microsoft.com/office/powerpoint/2010/main" val="1324819286"/>
       </p:ext>
     </p:extLst>
   </p:cSld>
@@ -13777,14 +13740,14 @@
           <a:effectLst/>
           <a:extLst>
             <a:ext uri="{909E8E84-426E-40DD-AFC4-6F175D3DCCD1}">
-              <a14:hiddenFill xmlns:a14="http://schemas.microsoft.com/office/drawing/2010/main" xmlns="">
+              <a14:hiddenFill xmlns="" xmlns:a14="http://schemas.microsoft.com/office/drawing/2010/main">
                 <a:solidFill>
                   <a:schemeClr val="accent1"/>
                 </a:solidFill>
               </a14:hiddenFill>
             </a:ext>
             <a:ext uri="{91240B29-F687-4F45-9708-019B960494DF}">
-              <a14:hiddenLine xmlns:a14="http://schemas.microsoft.com/office/drawing/2010/main" xmlns="" w="9525">
+              <a14:hiddenLine xmlns="" xmlns:a14="http://schemas.microsoft.com/office/drawing/2010/main" w="9525">
                 <a:solidFill>
                   <a:schemeClr val="tx1"/>
                 </a:solidFill>
@@ -13794,7 +13757,7 @@
               </a14:hiddenLine>
             </a:ext>
             <a:ext uri="{AF507438-7753-43E0-B8FC-AC1667EBCBE1}">
-              <a14:hiddenEffects xmlns:a14="http://schemas.microsoft.com/office/drawing/2010/main" xmlns="">
+              <a14:hiddenEffects xmlns="" xmlns:a14="http://schemas.microsoft.com/office/drawing/2010/main">
                 <a:effectLst>
                   <a:outerShdw dist="35921" dir="2700000" algn="ctr" rotWithShape="0">
                     <a:schemeClr val="bg2"/>
@@ -13902,7 +13865,7 @@
     </p:spTree>
     <p:extLst>
       <p:ext uri="{BB962C8B-B14F-4D97-AF65-F5344CB8AC3E}">
-        <p14:creationId xmlns:p14="http://schemas.microsoft.com/office/powerpoint/2010/main" xmlns="" val="3293126798"/>
+        <p14:creationId xmlns="" xmlns:p14="http://schemas.microsoft.com/office/powerpoint/2010/main" val="3293126798"/>
       </p:ext>
     </p:extLst>
   </p:cSld>
@@ -14483,7 +14446,7 @@
     </p:spTree>
     <p:extLst>
       <p:ext uri="{BB962C8B-B14F-4D97-AF65-F5344CB8AC3E}">
-        <p14:creationId xmlns:p14="http://schemas.microsoft.com/office/powerpoint/2010/main" xmlns="" val="4217875043"/>
+        <p14:creationId xmlns="" xmlns:p14="http://schemas.microsoft.com/office/powerpoint/2010/main" val="4217875043"/>
       </p:ext>
     </p:extLst>
   </p:cSld>
@@ -14525,7 +14488,7 @@
         </p:nvSpPr>
         <p:spPr>
           <a:xfrm>
-            <a:off x="450360" y="3279410"/>
+            <a:off x="50310" y="3488960"/>
             <a:ext cx="2422568" cy="629392"/>
           </a:xfrm>
           <a:prstGeom prst="rect">
@@ -14666,7 +14629,7 @@
         </p:blipFill>
         <p:spPr>
           <a:xfrm>
-            <a:off x="774017" y="1438013"/>
+            <a:off x="164417" y="1438013"/>
             <a:ext cx="1938748" cy="1974742"/>
           </a:xfrm>
           <a:prstGeom prst="rect">
@@ -14742,7 +14705,7 @@
         </p:nvSpPr>
         <p:spPr>
           <a:xfrm>
-            <a:off x="4679095" y="3262859"/>
+            <a:off x="3936145" y="3262859"/>
             <a:ext cx="2600797" cy="629392"/>
           </a:xfrm>
           <a:prstGeom prst="rect">
@@ -14818,7 +14781,7 @@
                   <a:srgbClr val="1E3272"/>
                 </a:solidFill>
               </a:rPr>
-              <a:t>Logvinchuk</a:t>
+              <a:t>Molostov</a:t>
             </a:r>
             <a:endParaRPr lang="ru-RU" sz="2000" b="1" dirty="0" smtClean="0">
               <a:solidFill>
@@ -14883,7 +14846,7 @@
         </p:nvSpPr>
         <p:spPr>
           <a:xfrm>
-            <a:off x="6779523" y="3251278"/>
+            <a:off x="6007998" y="3251278"/>
             <a:ext cx="2600797" cy="629392"/>
           </a:xfrm>
           <a:prstGeom prst="rect">
@@ -14939,7 +14902,7 @@
         </p:blipFill>
         <p:spPr>
           <a:xfrm>
-            <a:off x="4933602" y="1436574"/>
+            <a:off x="4057302" y="1436574"/>
             <a:ext cx="2108138" cy="1951227"/>
           </a:xfrm>
           <a:prstGeom prst="rect">
@@ -14964,7 +14927,7 @@
         </p:blipFill>
         <p:spPr>
           <a:xfrm>
-            <a:off x="7200350" y="1418221"/>
+            <a:off x="6295475" y="1437271"/>
             <a:ext cx="1877296" cy="1939211"/>
           </a:xfrm>
           <a:prstGeom prst="rect">
@@ -14980,7 +14943,7 @@
         </p:nvSpPr>
         <p:spPr>
           <a:xfrm>
-            <a:off x="2657025" y="3343586"/>
+            <a:off x="1990275" y="3343586"/>
             <a:ext cx="2380341" cy="490922"/>
           </a:xfrm>
           <a:prstGeom prst="rect">
@@ -15044,7 +15007,7 @@
         </p:blipFill>
         <p:spPr>
           <a:xfrm>
-            <a:off x="2969697" y="1434675"/>
+            <a:off x="2217222" y="1434675"/>
             <a:ext cx="1719801" cy="1959411"/>
           </a:xfrm>
           <a:prstGeom prst="rect">
@@ -15060,7 +15023,7 @@
         </p:nvSpPr>
         <p:spPr>
           <a:xfrm>
-            <a:off x="8884548" y="3260803"/>
+            <a:off x="7960623" y="3260803"/>
             <a:ext cx="2600797" cy="629392"/>
           </a:xfrm>
           <a:prstGeom prst="rect">
@@ -15125,15 +15088,15 @@
         </p:nvPicPr>
         <p:blipFill>
           <a:blip r:embed="rId6" cstate="print"/>
-          <a:srcRect l="13522" r="11873" b="47955"/>
+          <a:srcRect l="15820" r="15820" b="47955"/>
           <a:stretch>
             <a:fillRect/>
           </a:stretch>
         </p:blipFill>
         <p:spPr>
           <a:xfrm>
-            <a:off x="9281736" y="1428759"/>
-            <a:ext cx="2035849" cy="1894923"/>
+            <a:off x="8287157" y="1428759"/>
+            <a:ext cx="1865446" cy="1894923"/>
           </a:xfrm>
           <a:prstGeom prst="rect">
             <a:avLst/>
@@ -15478,6 +15441,94 @@
           </a:p>
         </p:txBody>
       </p:sp>
+      <p:pic>
+        <p:nvPicPr>
+          <p:cNvPr id="29" name="Рисунок 28" descr="photo_2026-01-23_10-13-02.jpg"/>
+          <p:cNvPicPr>
+            <a:picLocks noChangeAspect="1"/>
+          </p:cNvPicPr>
+          <p:nvPr/>
+        </p:nvPicPr>
+        <p:blipFill>
+          <a:blip r:embed="rId13" cstate="print"/>
+          <a:srcRect r="12899"/>
+          <a:stretch>
+            <a:fillRect/>
+          </a:stretch>
+        </p:blipFill>
+        <p:spPr>
+          <a:xfrm>
+            <a:off x="10256887" y="1419248"/>
+            <a:ext cx="1750202" cy="1917954"/>
+          </a:xfrm>
+          <a:prstGeom prst="rect">
+            <a:avLst/>
+          </a:prstGeom>
+        </p:spPr>
+      </p:pic>
+      <p:sp>
+        <p:nvSpPr>
+          <p:cNvPr id="31" name="TextBox 30"/>
+          <p:cNvSpPr txBox="1"/>
+          <p:nvPr/>
+        </p:nvSpPr>
+        <p:spPr>
+          <a:xfrm>
+            <a:off x="9694173" y="3489403"/>
+            <a:ext cx="2600797" cy="629392"/>
+          </a:xfrm>
+          <a:prstGeom prst="rect">
+            <a:avLst/>
+          </a:prstGeom>
+          <a:noFill/>
+        </p:spPr>
+        <p:txBody>
+          <a:bodyPr wrap="square" lIns="72000" tIns="25200" rIns="0" bIns="25200" rtlCol="0" anchor="ctr" anchorCtr="0">
+            <a:noAutofit/>
+          </a:bodyPr>
+          <a:lstStyle/>
+          <a:p>
+            <a:pPr algn="ctr"/>
+            <a:r>
+              <a:rPr lang="en-US" sz="2300" b="1" dirty="0" smtClean="0">
+                <a:solidFill>
+                  <a:srgbClr val="1E3272"/>
+                </a:solidFill>
+              </a:rPr>
+              <a:t> </a:t>
+            </a:r>
+            <a:r>
+              <a:rPr lang="en-US" sz="2300" b="1" dirty="0" err="1" smtClean="0">
+                <a:solidFill>
+                  <a:srgbClr val="1E3272"/>
+                </a:solidFill>
+              </a:rPr>
+              <a:t>Veniamin</a:t>
+            </a:r>
+            <a:r>
+              <a:rPr lang="en-US" sz="2300" b="1" dirty="0" smtClean="0">
+                <a:solidFill>
+                  <a:srgbClr val="1E3272"/>
+                </a:solidFill>
+              </a:rPr>
+              <a:t> </a:t>
+            </a:r>
+            <a:r>
+              <a:rPr lang="en-US" sz="2300" b="1" dirty="0" err="1" smtClean="0">
+                <a:solidFill>
+                  <a:srgbClr val="1E3272"/>
+                </a:solidFill>
+              </a:rPr>
+              <a:t>Arefev</a:t>
+            </a:r>
+            <a:endParaRPr lang="ru-RU" sz="2300" b="1" dirty="0" smtClean="0">
+              <a:solidFill>
+                <a:srgbClr val="1E3272"/>
+              </a:solidFill>
+            </a:endParaRPr>
+          </a:p>
+        </p:txBody>
+      </p:sp>
     </p:spTree>
   </p:cSld>
   <p:clrMapOvr>
@@ -15631,11 +15682,7 @@
           <a:p>
             <a:r>
               <a:rPr lang="en-US" dirty="0" smtClean="0"/>
-              <a:t>COMPDS </a:t>
-            </a:r>
-            <a:r>
-              <a:rPr lang="en-US" dirty="0" smtClean="0"/>
-              <a:t>Course Team</a:t>
+              <a:t>COMPDS Course Team</a:t>
             </a:r>
             <a:endParaRPr lang="ru-RU" dirty="0"/>
           </a:p>
@@ -16553,7 +16600,7 @@
           <a:effectLst/>
           <a:extLst>
             <a:ext uri="{91240B29-F687-4F45-9708-019B960494DF}">
-              <a14:hiddenLine xmlns:a14="http://schemas.microsoft.com/office/drawing/2010/main" xmlns="" w="9525">
+              <a14:hiddenLine xmlns="" xmlns:a14="http://schemas.microsoft.com/office/drawing/2010/main" w="9525">
                 <a:solidFill>
                   <a:schemeClr val="tx1"/>
                 </a:solidFill>
@@ -16563,7 +16610,7 @@
               </a14:hiddenLine>
             </a:ext>
             <a:ext uri="{AF507438-7753-43E0-B8FC-AC1667EBCBE1}">
-              <a14:hiddenEffects xmlns:a14="http://schemas.microsoft.com/office/drawing/2010/main" xmlns="">
+              <a14:hiddenEffects xmlns="" xmlns:a14="http://schemas.microsoft.com/office/drawing/2010/main">
                 <a:effectLst>
                   <a:outerShdw dist="35921" dir="2700000" algn="ctr" rotWithShape="0">
                     <a:schemeClr val="bg2"/>
@@ -18135,7 +18182,7 @@
           <a:effectLst/>
           <a:extLst>
             <a:ext uri="{91240B29-F687-4F45-9708-019B960494DF}">
-              <a14:hiddenLine xmlns:a14="http://schemas.microsoft.com/office/drawing/2010/main" xmlns="" w="9525">
+              <a14:hiddenLine xmlns="" xmlns:a14="http://schemas.microsoft.com/office/drawing/2010/main" w="9525">
                 <a:solidFill>
                   <a:schemeClr val="tx1"/>
                 </a:solidFill>
@@ -18145,7 +18192,7 @@
               </a14:hiddenLine>
             </a:ext>
             <a:ext uri="{AF507438-7753-43E0-B8FC-AC1667EBCBE1}">
-              <a14:hiddenEffects xmlns:a14="http://schemas.microsoft.com/office/drawing/2010/main" xmlns="">
+              <a14:hiddenEffects xmlns="" xmlns:a14="http://schemas.microsoft.com/office/drawing/2010/main">
                 <a:effectLst>
                   <a:outerShdw dist="35921" dir="2700000" algn="ctr" rotWithShape="0">
                     <a:schemeClr val="bg2"/>
@@ -18194,7 +18241,7 @@
         </p:txBody>
       </p:sp>
       <mc:AlternateContent xmlns:mc="http://schemas.openxmlformats.org/markup-compatibility/2006">
-        <mc:Choice xmlns:a14="http://schemas.microsoft.com/office/drawing/2010/main" xmlns="" Requires="a14">
+        <mc:Choice xmlns="" xmlns:a14="http://schemas.microsoft.com/office/drawing/2010/main" Requires="a14">
           <p:sp>
             <p:nvSpPr>
               <p:cNvPr id="8" name="Содержимое 1"/>
@@ -18673,7 +18720,7 @@
     </p:spTree>
     <p:extLst>
       <p:ext uri="{BB962C8B-B14F-4D97-AF65-F5344CB8AC3E}">
-        <p14:creationId xmlns:p14="http://schemas.microsoft.com/office/powerpoint/2010/main" xmlns="" val="611271091"/>
+        <p14:creationId xmlns="" xmlns:p14="http://schemas.microsoft.com/office/powerpoint/2010/main" val="611271091"/>
       </p:ext>
     </p:extLst>
   </p:cSld>
@@ -18798,7 +18845,7 @@
           <a:effectLst/>
           <a:extLst>
             <a:ext uri="{91240B29-F687-4F45-9708-019B960494DF}">
-              <a14:hiddenLine xmlns:a14="http://schemas.microsoft.com/office/drawing/2010/main" xmlns="" w="9525">
+              <a14:hiddenLine xmlns="" xmlns:a14="http://schemas.microsoft.com/office/drawing/2010/main" w="9525">
                 <a:solidFill>
                   <a:schemeClr val="tx1"/>
                 </a:solidFill>
@@ -18808,7 +18855,7 @@
               </a14:hiddenLine>
             </a:ext>
             <a:ext uri="{AF507438-7753-43E0-B8FC-AC1667EBCBE1}">
-              <a14:hiddenEffects xmlns:a14="http://schemas.microsoft.com/office/drawing/2010/main" xmlns="">
+              <a14:hiddenEffects xmlns="" xmlns:a14="http://schemas.microsoft.com/office/drawing/2010/main">
                 <a:effectLst>
                   <a:outerShdw dist="35921" dir="2700000" algn="ctr" rotWithShape="0">
                     <a:schemeClr val="bg2"/>
@@ -20728,7 +20775,7 @@
         </p:txBody>
       </p:sp>
       <mc:AlternateContent xmlns:mc="http://schemas.openxmlformats.org/markup-compatibility/2006">
-        <mc:Choice xmlns:a14="http://schemas.microsoft.com/office/drawing/2010/main" xmlns="" Requires="a14">
+        <mc:Choice xmlns="" xmlns:a14="http://schemas.microsoft.com/office/drawing/2010/main" Requires="a14">
           <p:sp>
             <p:nvSpPr>
               <p:cNvPr id="6" name="Содержимое 1"/>
@@ -21207,7 +21254,7 @@
     </p:spTree>
     <p:extLst>
       <p:ext uri="{BB962C8B-B14F-4D97-AF65-F5344CB8AC3E}">
-        <p14:creationId xmlns:p14="http://schemas.microsoft.com/office/powerpoint/2010/main" xmlns="" val="476216845"/>
+        <p14:creationId xmlns="" xmlns:p14="http://schemas.microsoft.com/office/powerpoint/2010/main" val="476216845"/>
       </p:ext>
     </p:extLst>
   </p:cSld>
@@ -23205,7 +23252,7 @@
         </p:txBody>
       </p:sp>
       <mc:AlternateContent xmlns:mc="http://schemas.openxmlformats.org/markup-compatibility/2006">
-        <mc:Choice xmlns:a14="http://schemas.microsoft.com/office/drawing/2010/main" xmlns="" Requires="a14">
+        <mc:Choice xmlns="" xmlns:a14="http://schemas.microsoft.com/office/drawing/2010/main" Requires="a14">
           <p:sp>
             <p:nvSpPr>
               <p:cNvPr id="8" name="Содержимое 1"/>
@@ -23699,7 +23746,7 @@
     </p:spTree>
     <p:extLst>
       <p:ext uri="{BB962C8B-B14F-4D97-AF65-F5344CB8AC3E}">
-        <p14:creationId xmlns:p14="http://schemas.microsoft.com/office/powerpoint/2010/main" xmlns="" val="3690992376"/>
+        <p14:creationId xmlns="" xmlns:p14="http://schemas.microsoft.com/office/powerpoint/2010/main" val="3690992376"/>
       </p:ext>
     </p:extLst>
   </p:cSld>
@@ -23991,7 +24038,7 @@
   <a:extraClrSchemeLst/>
   <a:extLst>
     <a:ext uri="{05A4C25C-085E-4340-85A3-A5531E510DB2}">
-      <thm15:themeFamily xmlns:thm15="http://schemas.microsoft.com/office/thememl/2012/main" xmlns="" name="Office Theme" id="{62F939B6-93AF-4DB8-9C6B-D6C7DFDC589F}" vid="{4A3C46E8-61CC-4603-A589-7422A47A8E4A}"/>
+      <thm15:themeFamily xmlns="" xmlns:thm15="http://schemas.microsoft.com/office/thememl/2012/main" name="Office Theme" id="{62F939B6-93AF-4DB8-9C6B-D6C7DFDC589F}" vid="{4A3C46E8-61CC-4603-A589-7422A47A8E4A}"/>
     </a:ext>
   </a:extLst>
 </a:theme>
@@ -24252,7 +24299,7 @@
   <a:extraClrSchemeLst/>
   <a:extLst>
     <a:ext uri="{05A4C25C-085E-4340-85A3-A5531E510DB2}">
-      <thm15:themeFamily xmlns:thm15="http://schemas.microsoft.com/office/thememl/2012/main" xmlns="" name="Office Theme" id="{62F939B6-93AF-4DB8-9C6B-D6C7DFDC589F}" vid="{4A3C46E8-61CC-4603-A589-7422A47A8E4A}"/>
+      <thm15:themeFamily xmlns="" xmlns:thm15="http://schemas.microsoft.com/office/thememl/2012/main" name="Office Theme" id="{62F939B6-93AF-4DB8-9C6B-D6C7DFDC589F}" vid="{4A3C46E8-61CC-4603-A589-7422A47A8E4A}"/>
     </a:ext>
   </a:extLst>
 </a:theme>
@@ -24513,7 +24560,7 @@
   <a:extraClrSchemeLst/>
   <a:extLst>
     <a:ext uri="{05A4C25C-085E-4340-85A3-A5531E510DB2}">
-      <thm15:themeFamily xmlns:thm15="http://schemas.microsoft.com/office/thememl/2012/main" xmlns="" name="Office Theme" id="{62F939B6-93AF-4DB8-9C6B-D6C7DFDC589F}" vid="{4A3C46E8-61CC-4603-A589-7422A47A8E4A}"/>
+      <thm15:themeFamily xmlns="" xmlns:thm15="http://schemas.microsoft.com/office/thememl/2012/main" name="Office Theme" id="{62F939B6-93AF-4DB8-9C6B-D6C7DFDC589F}" vid="{4A3C46E8-61CC-4603-A589-7422A47A8E4A}"/>
     </a:ext>
   </a:extLst>
 </a:theme>
